--- a/Ethereum_Fraud_Detection_Presentation.pptx
+++ b/Ethereum_Fraud_Detection_Presentation.pptx
@@ -4,6 +4,9 @@
   <p:sldMasterIdLst>
     <p:sldMasterId id="2147483648" r:id="rId1"/>
   </p:sldMasterIdLst>
+  <p:notesMasterIdLst>
+    <p:notesMasterId r:id="rId16"/>
+  </p:notesMasterIdLst>
   <p:sldIdLst>
     <p:sldId id="256" r:id="rId2"/>
     <p:sldId id="257" r:id="rId3"/>
@@ -20,10 +23,7 @@
     <p:sldId id="268" r:id="rId14"/>
     <p:sldId id="269" r:id="rId15"/>
   </p:sldIdLst>
-  <p:notesMasterIdLst>
-    <p:notesMasterId r:id="rId16"/>
-  </p:notesMasterIdLst>
-  <p:sldSz cx="9144000" cy="5143500"/>
+  <p:sldSz cx="9144000" cy="5143500" type="screen16x9"/>
   <p:notesSz cx="5143500" cy="9144000"/>
   <p:defaultTextStyle>
     <a:lvl1pPr marL="0" algn="l" defTabSz="914400" rtl="0" eaLnBrk="1" latinLnBrk="0" hangingPunct="1">
@@ -117,13 +117,20 @@
       </a:defRPr>
     </a:lvl9pPr>
   </p:defaultTextStyle>
+  <p:extLst>
+    <p:ext uri="{EFAFB233-063F-42B5-8137-9DF3F51BA10A}">
+      <p15:sldGuideLst xmlns:p15="http://schemas.microsoft.com/office/powerpoint/2012/main"/>
+    </p:ext>
+  </p:extLst>
 </p:presentation>
 </file>
 
 <file path=ppt/charts/chart1.xml><?xml version="1.0" encoding="utf-8"?>
-<c:chartSpace xmlns:c="http://schemas.openxmlformats.org/drawingml/2006/chart" xmlns:a="http://schemas.openxmlformats.org/drawingml/2006/main" xmlns:r="http://schemas.openxmlformats.org/officeDocument/2006/relationships">
+<c:chartSpace xmlns:c="http://schemas.openxmlformats.org/drawingml/2006/chart" xmlns:a="http://schemas.openxmlformats.org/drawingml/2006/main" xmlns:r="http://schemas.openxmlformats.org/officeDocument/2006/relationships" xmlns:c16r2="http://schemas.microsoft.com/office/drawing/2015/06/chart">
   <c:date1904 val="0"/>
+  <c:lang val="en-US"/>
   <c:roundedCorners val="1"/>
+  <c:style val="2"/>
   <c:chart>
     <c:autoTitleDeleted val="1"/>
     <c:plotArea>
@@ -153,30 +160,6 @@
             <a:effectLst/>
           </c:spPr>
           <c:invertIfNegative val="0"/>
-          <c:dLbls>
-            <c:numFmt formatCode="#,##0" sourceLinked="0"/>
-            <c:txPr>
-              <a:bodyPr/>
-              <a:lstStyle/>
-              <a:p>
-                <a:pPr>
-                  <a:defRPr b="0" i="0" strike="noStrike" sz="1400" u="none">
-                    <a:solidFill>
-                      <a:srgbClr val="6B6B6B"/>
-                    </a:solidFill>
-                    <a:latin typeface="+mn-lt"/>
-                  </a:defRPr>
-                </a:pPr>
-              </a:p>
-            </c:txPr>
-            <c:showLegendKey val="0"/>
-            <c:showVal val="1"/>
-            <c:showCatName val="0"/>
-            <c:showSerName val="0"/>
-            <c:showPercent val="0"/>
-            <c:showBubbleSize val="0"/>
-            <c:showLeaderLines val="0"/>
-          </c:dLbls>
           <c:dPt>
             <c:idx val="0"/>
             <c:invertIfNegative val="0"/>
@@ -187,6 +170,11 @@
               </a:solidFill>
               <a:effectLst/>
             </c:spPr>
+            <c:extLst>
+              <c:ext xmlns:c16="http://schemas.microsoft.com/office/drawing/2014/chart" uri="{C3380CC4-5D6E-409C-BE32-E72D297353CC}">
+                <c16:uniqueId val="{00000001-E71D-4F82-8C32-8CB4CEF2ADD4}"/>
+              </c:ext>
+            </c:extLst>
           </c:dPt>
           <c:dPt>
             <c:idx val="1"/>
@@ -198,22 +186,62 @@
               </a:solidFill>
               <a:effectLst/>
             </c:spPr>
+            <c:extLst>
+              <c:ext xmlns:c16="http://schemas.microsoft.com/office/drawing/2014/chart" uri="{C3380CC4-5D6E-409C-BE32-E72D297353CC}">
+                <c16:uniqueId val="{00000003-E71D-4F82-8C32-8CB4CEF2ADD4}"/>
+              </c:ext>
+            </c:extLst>
           </c:dPt>
+          <c:dLbls>
+            <c:numFmt formatCode="#,##0" sourceLinked="0"/>
+            <c:spPr>
+              <a:noFill/>
+              <a:ln>
+                <a:noFill/>
+              </a:ln>
+              <a:effectLst/>
+            </c:spPr>
+            <c:txPr>
+              <a:bodyPr/>
+              <a:lstStyle/>
+              <a:p>
+                <a:pPr>
+                  <a:defRPr sz="1400" b="0" i="0" u="none" strike="noStrike">
+                    <a:solidFill>
+                      <a:srgbClr val="6B6B6B"/>
+                    </a:solidFill>
+                    <a:latin typeface="+mn-lt"/>
+                  </a:defRPr>
+                </a:pPr>
+                <a:endParaRPr lang="en-US"/>
+              </a:p>
+            </c:txPr>
+            <c:showLegendKey val="0"/>
+            <c:showVal val="1"/>
+            <c:showCatName val="0"/>
+            <c:showSerName val="0"/>
+            <c:showPercent val="0"/>
+            <c:showBubbleSize val="0"/>
+            <c:showLeaderLines val="0"/>
+            <c:extLst>
+              <c:ext xmlns:c15="http://schemas.microsoft.com/office/drawing/2012/chart" uri="{CE6537A1-D6FC-4f65-9D91-7224C49458BB}">
+                <c15:showLeaderLines val="0"/>
+              </c:ext>
+            </c:extLst>
+          </c:dLbls>
           <c:cat>
-            <c:multiLvlStrRef>
+            <c:strRef>
               <c:f>Sheet1!$A$2:$A$3</c:f>
-              <c:multiLvlStrCache>
+              <c:strCache>
                 <c:ptCount val="2"/>
-                <c:lvl>
-                  <c:pt idx="0">
-                    <c:v>Legitimate (0)</c:v>
-                  </c:pt>
-                  <c:pt idx="1">
-                    <c:v>Fraud (1)</c:v>
-                  </c:pt>
-                </c:lvl>
-              </c:multiLvlStrCache>
-            </c:multiLvlStrRef>
+                <c:pt idx="0">
+                  <c:v>Legitimate (0)</c:v>
+                </c:pt>
+                <c:pt idx="1">
+                  <c:v>Fraud (1)</c:v>
+                </c:pt>
+              </c:strCache>
+            </c:strRef>
           </c:cat>
           <c:val>
             <c:numRef>
@@ -230,36 +258,23 @@
               </c:numCache>
             </c:numRef>
           </c:val>
+          <c:extLst>
+            <c:ext xmlns:c16="http://schemas.microsoft.com/office/drawing/2014/chart" uri="{C3380CC4-5D6E-409C-BE32-E72D297353CC}">
+              <c16:uniqueId val="{00000004-E71D-4F82-8C32-8CB4CEF2ADD4}"/>
+            </c:ext>
+          </c:extLst>
         </c:ser>
         <c:dLbls>
-          <c:numFmt formatCode="#,##0" sourceLinked="0"/>
-          <c:txPr>
-            <a:bodyPr/>
-            <a:lstStyle/>
-            <a:p>
-              <a:pPr>
-                <a:defRPr b="0" i="0" strike="noStrike" sz="1400" u="none">
-                  <a:solidFill>
-                    <a:srgbClr val="6B6B6B"/>
-                  </a:solidFill>
-                  <a:latin typeface="+mn-lt"/>
-                </a:defRPr>
-              </a:pPr>
-            </a:p>
-          </c:txPr>
           <c:showLegendKey val="0"/>
           <c:showVal val="1"/>
           <c:showCatName val="0"/>
           <c:showSerName val="0"/>
           <c:showPercent val="0"/>
           <c:showBubbleSize val="0"/>
-          <c:showLeaderLines val="0"/>
         </c:dLbls>
         <c:gapWidth val="60"/>
-        <c:overlap val="0"/>
         <c:axId val="2094734554"/>
         <c:axId val="2094734552"/>
-        <c:axId val="2094734556"/>
       </c:barChart>
       <c:catAx>
         <c:axId val="2094734554"/>
@@ -300,6 +315,7 @@
         <c:crosses val="autoZero"/>
         <c:auto val="1"/>
         <c:lblAlgn val="ctr"/>
+        <c:lblOffset val="100"/>
         <c:noMultiLvlLbl val="1"/>
       </c:catAx>
       <c:valAx>
@@ -337,7 +353,7 @@
                   </a:defRPr>
                 </a:pPr>
                 <a:r>
-                  <a:rPr sz="1400" b="0" i="0" u="none" strike="noStrike">
+                  <a:rPr lang="en-IN" sz="1400" b="0" i="0" u="none" strike="noStrike">
                     <a:solidFill>
                       <a:srgbClr val="6B6B6B"/>
                     </a:solidFill>
@@ -348,7 +364,6 @@
               </a:p>
             </c:rich>
           </c:tx>
-          <c:layout/>
           <c:overlay val="0"/>
         </c:title>
         <c:numFmt formatCode="#,##0" sourceLinked="0"/>
@@ -392,6 +407,7 @@
     </c:plotArea>
     <c:plotVisOnly val="1"/>
     <c:dispBlanksAs val="span"/>
+    <c:showDLblsOverMax val="1"/>
   </c:chart>
   <c:spPr>
     <a:noFill/>
@@ -407,9 +423,11 @@
 </file>
 
 <file path=ppt/charts/chart2.xml><?xml version="1.0" encoding="utf-8"?>
-<c:chartSpace xmlns:c="http://schemas.openxmlformats.org/drawingml/2006/chart" xmlns:a="http://schemas.openxmlformats.org/drawingml/2006/main" xmlns:r="http://schemas.openxmlformats.org/officeDocument/2006/relationships">
+<c:chartSpace xmlns:c="http://schemas.openxmlformats.org/drawingml/2006/chart" xmlns:a="http://schemas.openxmlformats.org/drawingml/2006/main" xmlns:r="http://schemas.openxmlformats.org/officeDocument/2006/relationships" xmlns:c16r2="http://schemas.microsoft.com/office/drawing/2015/06/chart">
   <c:date1904 val="0"/>
+  <c:lang val="en-US"/>
   <c:roundedCorners val="1"/>
+  <c:style val="2"/>
   <c:chart>
     <c:autoTitleDeleted val="1"/>
     <c:plotArea>
@@ -439,51 +457,25 @@
             <a:effectLst/>
           </c:spPr>
           <c:invertIfNegative val="0"/>
-          <c:dLbls>
-            <c:numFmt formatCode="#,##0" sourceLinked="0"/>
-            <c:txPr>
-              <a:bodyPr/>
-              <a:lstStyle/>
-              <a:p>
-                <a:pPr>
-                  <a:defRPr b="0" i="0" strike="noStrike" sz="1400" u="none">
-                    <a:solidFill>
-                      <a:srgbClr val="6B6B6B"/>
-                    </a:solidFill>
-                    <a:latin typeface="+mn-lt"/>
-                  </a:defRPr>
-                </a:pPr>
-              </a:p>
-            </c:txPr>
-            <c:showLegendKey val="0"/>
-            <c:showVal val="0"/>
-            <c:showCatName val="0"/>
-            <c:showSerName val="0"/>
-            <c:showPercent val="0"/>
-            <c:showBubbleSize val="0"/>
-            <c:showLeaderLines val="0"/>
-          </c:dLbls>
           <c:cat>
-            <c:multiLvlStrRef>
+            <c:strRef>
               <c:f>Sheet1!$A$2:$A$5</c:f>
-              <c:multiLvlStrCache>
+              <c:strCache>
                 <c:ptCount val="4"/>
-                <c:lvl>
-                  <c:pt idx="0">
-                    <c:v>LR</c:v>
-                  </c:pt>
-                  <c:pt idx="1">
-                    <c:v>DT</c:v>
-                  </c:pt>
-                  <c:pt idx="2">
-                    <c:v>RF</c:v>
-                  </c:pt>
-                  <c:pt idx="3">
-                    <c:v>XGBoost</c:v>
-                  </c:pt>
-                </c:lvl>
-              </c:multiLvlStrCache>
-            </c:multiLvlStrRef>
+                <c:pt idx="0">
+                  <c:v>LR</c:v>
+                </c:pt>
+                <c:pt idx="1">
+                  <c:v>DT</c:v>
+                </c:pt>
+                <c:pt idx="2">
+                  <c:v>RF</c:v>
+                </c:pt>
+                <c:pt idx="3">
+                  <c:v>XGBoost</c:v>
+                </c:pt>
+              </c:strCache>
+            </c:strRef>
           </c:cat>
           <c:val>
             <c:numRef>
@@ -492,7 +484,7 @@
                 <c:formatCode>General</c:formatCode>
                 <c:ptCount val="4"/>
                 <c:pt idx="0">
-                  <c:v>0.966</c:v>
+                  <c:v>0.96599999999999997</c:v>
                 </c:pt>
                 <c:pt idx="1">
                   <c:v>0.97</c:v>
@@ -506,6 +498,11 @@
               </c:numCache>
             </c:numRef>
           </c:val>
+          <c:extLst>
+            <c:ext xmlns:c16="http://schemas.microsoft.com/office/drawing/2014/chart" uri="{C3380CC4-5D6E-409C-BE32-E72D297353CC}">
+              <c16:uniqueId val="{00000000-A202-4596-B392-050F4D092753}"/>
+            </c:ext>
+          </c:extLst>
         </c:ser>
         <c:ser>
           <c:idx val="1"/>
@@ -528,51 +525,25 @@
             <a:effectLst/>
           </c:spPr>
           <c:invertIfNegative val="0"/>
-          <c:dLbls>
-            <c:numFmt formatCode="#,##0" sourceLinked="0"/>
-            <c:txPr>
-              <a:bodyPr/>
-              <a:lstStyle/>
-              <a:p>
-                <a:pPr>
-                  <a:defRPr b="0" i="0" strike="noStrike" sz="1400" u="none">
-                    <a:solidFill>
-                      <a:srgbClr val="6B6B6B"/>
-                    </a:solidFill>
-                    <a:latin typeface="+mn-lt"/>
-                  </a:defRPr>
-                </a:pPr>
-              </a:p>
-            </c:txPr>
-            <c:showLegendKey val="0"/>
-            <c:showVal val="0"/>
-            <c:showCatName val="0"/>
-            <c:showSerName val="0"/>
-            <c:showPercent val="0"/>
-            <c:showBubbleSize val="0"/>
-            <c:showLeaderLines val="0"/>
-          </c:dLbls>
           <c:cat>
-            <c:multiLvlStrRef>
+            <c:strRef>
               <c:f>Sheet1!$A$2:$A$5</c:f>
-              <c:multiLvlStrCache>
+              <c:strCache>
                 <c:ptCount val="4"/>
-                <c:lvl>
-                  <c:pt idx="0">
-                    <c:v>LR</c:v>
-                  </c:pt>
-                  <c:pt idx="1">
-                    <c:v>DT</c:v>
-                  </c:pt>
-                  <c:pt idx="2">
-                    <c:v>RF</c:v>
-                  </c:pt>
-                  <c:pt idx="3">
-                    <c:v>XGBoost</c:v>
-                  </c:pt>
-                </c:lvl>
-              </c:multiLvlStrCache>
-            </c:multiLvlStrRef>
+                <c:pt idx="0">
+                  <c:v>LR</c:v>
+                </c:pt>
+                <c:pt idx="1">
+                  <c:v>DT</c:v>
+                </c:pt>
+                <c:pt idx="2">
+                  <c:v>RF</c:v>
+                </c:pt>
+                <c:pt idx="3">
+                  <c:v>XGBoost</c:v>
+                </c:pt>
+              </c:strCache>
+            </c:strRef>
           </c:cat>
           <c:val>
             <c:numRef>
@@ -581,20 +552,25 @@
                 <c:formatCode>General</c:formatCode>
                 <c:ptCount val="4"/>
                 <c:pt idx="0">
-                  <c:v>0.983</c:v>
+                  <c:v>0.98299999999999998</c:v>
                 </c:pt>
                 <c:pt idx="1">
-                  <c:v>0.974</c:v>
+                  <c:v>0.97399999999999998</c:v>
                 </c:pt>
                 <c:pt idx="2">
-                  <c:v>0.972</c:v>
+                  <c:v>0.97199999999999998</c:v>
                 </c:pt>
                 <c:pt idx="3">
-                  <c:v>0.983</c:v>
+                  <c:v>0.98299999999999998</c:v>
                 </c:pt>
               </c:numCache>
             </c:numRef>
           </c:val>
+          <c:extLst>
+            <c:ext xmlns:c16="http://schemas.microsoft.com/office/drawing/2014/chart" uri="{C3380CC4-5D6E-409C-BE32-E72D297353CC}">
+              <c16:uniqueId val="{00000001-A202-4596-B392-050F4D092753}"/>
+            </c:ext>
+          </c:extLst>
         </c:ser>
         <c:ser>
           <c:idx val="2"/>
@@ -617,51 +593,25 @@
             <a:effectLst/>
           </c:spPr>
           <c:invertIfNegative val="0"/>
-          <c:dLbls>
-            <c:numFmt formatCode="#,##0" sourceLinked="0"/>
-            <c:txPr>
-              <a:bodyPr/>
-              <a:lstStyle/>
-              <a:p>
-                <a:pPr>
-                  <a:defRPr b="0" i="0" strike="noStrike" sz="1400" u="none">
-                    <a:solidFill>
-                      <a:srgbClr val="6B6B6B"/>
-                    </a:solidFill>
-                    <a:latin typeface="+mn-lt"/>
-                  </a:defRPr>
-                </a:pPr>
-              </a:p>
-            </c:txPr>
-            <c:showLegendKey val="0"/>
-            <c:showVal val="0"/>
-            <c:showCatName val="0"/>
-            <c:showSerName val="0"/>
-            <c:showPercent val="0"/>
-            <c:showBubbleSize val="0"/>
-            <c:showLeaderLines val="0"/>
-          </c:dLbls>
           <c:cat>
-            <c:multiLvlStrRef>
+            <c:strRef>
               <c:f>Sheet1!$A$2:$A$5</c:f>
-              <c:multiLvlStrCache>
+              <c:strCache>
                 <c:ptCount val="4"/>
-                <c:lvl>
-                  <c:pt idx="0">
-                    <c:v>LR</c:v>
-                  </c:pt>
-                  <c:pt idx="1">
-                    <c:v>DT</c:v>
-                  </c:pt>
-                  <c:pt idx="2">
-                    <c:v>RF</c:v>
-                  </c:pt>
-                  <c:pt idx="3">
-                    <c:v>XGBoost</c:v>
-                  </c:pt>
-                </c:lvl>
-              </c:multiLvlStrCache>
-            </c:multiLvlStrRef>
+                <c:pt idx="0">
+                  <c:v>LR</c:v>
+                </c:pt>
+                <c:pt idx="1">
+                  <c:v>DT</c:v>
+                </c:pt>
+                <c:pt idx="2">
+                  <c:v>RF</c:v>
+                </c:pt>
+                <c:pt idx="3">
+                  <c:v>XGBoost</c:v>
+                </c:pt>
+              </c:strCache>
+            </c:strRef>
           </c:cat>
           <c:val>
             <c:numRef>
@@ -670,20 +620,25 @@
                 <c:formatCode>General</c:formatCode>
                 <c:ptCount val="4"/>
                 <c:pt idx="0">
-                  <c:v>0.974</c:v>
+                  <c:v>0.97399999999999998</c:v>
                 </c:pt>
                 <c:pt idx="1">
-                  <c:v>0.972</c:v>
+                  <c:v>0.97199999999999998</c:v>
                 </c:pt>
                 <c:pt idx="2">
-                  <c:v>0.984</c:v>
+                  <c:v>0.98399999999999999</c:v>
                 </c:pt>
                 <c:pt idx="3">
-                  <c:v>0.989</c:v>
+                  <c:v>0.98899999999999999</c:v>
                 </c:pt>
               </c:numCache>
             </c:numRef>
           </c:val>
+          <c:extLst>
+            <c:ext xmlns:c16="http://schemas.microsoft.com/office/drawing/2014/chart" uri="{C3380CC4-5D6E-409C-BE32-E72D297353CC}">
+              <c16:uniqueId val="{00000002-A202-4596-B392-050F4D092753}"/>
+            </c:ext>
+          </c:extLst>
         </c:ser>
         <c:ser>
           <c:idx val="3"/>
@@ -706,51 +661,25 @@
             <a:effectLst/>
           </c:spPr>
           <c:invertIfNegative val="0"/>
-          <c:dLbls>
-            <c:numFmt formatCode="#,##0" sourceLinked="0"/>
-            <c:txPr>
-              <a:bodyPr/>
-              <a:lstStyle/>
-              <a:p>
-                <a:pPr>
-                  <a:defRPr b="0" i="0" strike="noStrike" sz="1400" u="none">
-                    <a:solidFill>
-                      <a:srgbClr val="6B6B6B"/>
-                    </a:solidFill>
-                    <a:latin typeface="+mn-lt"/>
-                  </a:defRPr>
-                </a:pPr>
-              </a:p>
-            </c:txPr>
-            <c:showLegendKey val="0"/>
-            <c:showVal val="0"/>
-            <c:showCatName val="0"/>
-            <c:showSerName val="0"/>
-            <c:showPercent val="0"/>
-            <c:showBubbleSize val="0"/>
-            <c:showLeaderLines val="0"/>
-          </c:dLbls>
           <c:cat>
-            <c:multiLvlStrRef>
+            <c:strRef>
               <c:f>Sheet1!$A$2:$A$5</c:f>
-              <c:multiLvlStrCache>
+              <c:strCache>
                 <c:ptCount val="4"/>
-                <c:lvl>
-                  <c:pt idx="0">
-                    <c:v>LR</c:v>
-                  </c:pt>
-                  <c:pt idx="1">
-                    <c:v>DT</c:v>
-                  </c:pt>
-                  <c:pt idx="2">
-                    <c:v>RF</c:v>
-                  </c:pt>
-                  <c:pt idx="3">
-                    <c:v>XGBoost</c:v>
-                  </c:pt>
-                </c:lvl>
-              </c:multiLvlStrCache>
-            </c:multiLvlStrRef>
+                <c:pt idx="0">
+                  <c:v>LR</c:v>
+                </c:pt>
+                <c:pt idx="1">
+                  <c:v>DT</c:v>
+                </c:pt>
+                <c:pt idx="2">
+                  <c:v>RF</c:v>
+                </c:pt>
+                <c:pt idx="3">
+                  <c:v>XGBoost</c:v>
+                </c:pt>
+              </c:strCache>
+            </c:strRef>
           </c:cat>
           <c:val>
             <c:numRef>
@@ -762,7 +691,7 @@
                   <c:v>0.995</c:v>
                 </c:pt>
                 <c:pt idx="1">
-                  <c:v>0.951</c:v>
+                  <c:v>0.95099999999999996</c:v>
                 </c:pt>
                 <c:pt idx="2">
                   <c:v>0.999</c:v>
@@ -773,36 +702,23 @@
               </c:numCache>
             </c:numRef>
           </c:val>
+          <c:extLst>
+            <c:ext xmlns:c16="http://schemas.microsoft.com/office/drawing/2014/chart" uri="{C3380CC4-5D6E-409C-BE32-E72D297353CC}">
+              <c16:uniqueId val="{00000003-A202-4596-B392-050F4D092753}"/>
+            </c:ext>
+          </c:extLst>
         </c:ser>
         <c:dLbls>
-          <c:numFmt formatCode="#,##0" sourceLinked="0"/>
-          <c:txPr>
-            <a:bodyPr/>
-            <a:lstStyle/>
-            <a:p>
-              <a:pPr>
-                <a:defRPr b="0" i="0" strike="noStrike" sz="1400" u="none">
-                  <a:solidFill>
-                    <a:srgbClr val="6B6B6B"/>
-                  </a:solidFill>
-                  <a:latin typeface="+mn-lt"/>
-                </a:defRPr>
-              </a:pPr>
-            </a:p>
-          </c:txPr>
           <c:showLegendKey val="0"/>
           <c:showVal val="0"/>
           <c:showCatName val="0"/>
           <c:showSerName val="0"/>
           <c:showPercent val="0"/>
           <c:showBubbleSize val="0"/>
-          <c:showLeaderLines val="0"/>
         </c:dLbls>
         <c:gapWidth val="40"/>
-        <c:overlap val="0"/>
         <c:axId val="2094734554"/>
         <c:axId val="2094734552"/>
-        <c:axId val="2094734556"/>
       </c:barChart>
       <c:catAx>
         <c:axId val="2094734554"/>
@@ -843,6 +759,7 @@
         <c:crosses val="autoZero"/>
         <c:auto val="1"/>
         <c:lblAlgn val="ctr"/>
+        <c:lblOffset val="100"/>
         <c:noMultiLvlLbl val="1"/>
       </c:catAx>
       <c:valAx>
@@ -880,7 +797,7 @@
                   </a:defRPr>
                 </a:pPr>
                 <a:r>
-                  <a:rPr sz="1400" b="0" i="0" u="none" strike="noStrike">
+                  <a:rPr lang="en-IN" sz="1400" b="0" i="0" u="none" strike="noStrike">
                     <a:solidFill>
                       <a:srgbClr val="6B6B6B"/>
                     </a:solidFill>
@@ -891,7 +808,6 @@
               </a:p>
             </c:rich>
           </c:tx>
-          <c:layout/>
           <c:overlay val="0"/>
         </c:title>
         <c:numFmt formatCode="0.00" sourceLinked="0"/>
@@ -955,6 +871,7 @@
     </c:legend>
     <c:plotVisOnly val="1"/>
     <c:dispBlanksAs val="span"/>
+    <c:showDLblsOverMax val="1"/>
   </c:chart>
   <c:spPr>
     <a:noFill/>
@@ -970,9 +887,11 @@
 </file>
 
 <file path=ppt/charts/chart3.xml><?xml version="1.0" encoding="utf-8"?>
-<c:chartSpace xmlns:c="http://schemas.openxmlformats.org/drawingml/2006/chart" xmlns:a="http://schemas.openxmlformats.org/drawingml/2006/main" xmlns:r="http://schemas.openxmlformats.org/officeDocument/2006/relationships">
+<c:chartSpace xmlns:c="http://schemas.openxmlformats.org/drawingml/2006/chart" xmlns:a="http://schemas.openxmlformats.org/drawingml/2006/main" xmlns:r="http://schemas.openxmlformats.org/officeDocument/2006/relationships" xmlns:c16r2="http://schemas.microsoft.com/office/drawing/2015/06/chart">
   <c:date1904 val="0"/>
+  <c:lang val="en-US"/>
   <c:roundedCorners val="1"/>
+  <c:style val="2"/>
   <c:chart>
     <c:autoTitleDeleted val="1"/>
     <c:plotArea>
@@ -1004,18 +923,26 @@
           <c:invertIfNegative val="0"/>
           <c:dLbls>
             <c:numFmt formatCode="0.00" sourceLinked="0"/>
+            <c:spPr>
+              <a:noFill/>
+              <a:ln>
+                <a:noFill/>
+              </a:ln>
+              <a:effectLst/>
+            </c:spPr>
             <c:txPr>
               <a:bodyPr/>
               <a:lstStyle/>
               <a:p>
                 <a:pPr>
-                  <a:defRPr b="0" i="0" strike="noStrike" sz="1400" u="none">
+                  <a:defRPr sz="1400" b="0" i="0" u="none" strike="noStrike">
                     <a:solidFill>
                       <a:srgbClr val="6B6B6B"/>
                     </a:solidFill>
                     <a:latin typeface="+mn-lt"/>
                   </a:defRPr>
                 </a:pPr>
+                <a:endParaRPr lang="en-US"/>
               </a:p>
             </c:txPr>
             <c:showLegendKey val="0"/>
@@ -1025,31 +952,34 @@
             <c:showPercent val="0"/>
             <c:showBubbleSize val="0"/>
             <c:showLeaderLines val="0"/>
+            <c:extLst>
+              <c:ext xmlns:c15="http://schemas.microsoft.com/office/drawing/2012/chart" uri="{CE6537A1-D6FC-4f65-9D91-7224C49458BB}">
+                <c15:showLeaderLines val="0"/>
+              </c:ext>
+            </c:extLst>
           </c:dLbls>
           <c:cat>
-            <c:multiLvlStrRef>
+            <c:strRef>
               <c:f>Sheet1!$A$2:$A$6</c:f>
-              <c:multiLvlStrCache>
+              <c:strCache>
                 <c:ptCount val="5"/>
-                <c:lvl>
-                  <c:pt idx="0">
-                    <c:v>Total_ERC20_tnxs</c:v>
-                  </c:pt>
-                  <c:pt idx="1">
-                    <c:v>ERC20_most_sent_token_type</c:v>
-                  </c:pt>
-                  <c:pt idx="2">
-                    <c:v>Time_Diff_between_first_and_last_Mins</c:v>
-                  </c:pt>
-                  <c:pt idx="3">
-                    <c:v>ERC20_total_ether_sent</c:v>
-                  </c:pt>
-                  <c:pt idx="4">
-                    <c:v>ERC20_most_rec_token_type_Unknown</c:v>
-                  </c:pt>
-                </c:lvl>
-              </c:multiLvlStrCache>
-            </c:multiLvlStrRef>
+                <c:pt idx="0">
+                  <c:v>Total_ERC20_tnxs</c:v>
+                </c:pt>
+                <c:pt idx="1">
+                  <c:v>ERC20_most_sent_token_type</c:v>
+                </c:pt>
+                <c:pt idx="2">
+                  <c:v>Time_Diff_between_first_and_last_Mins</c:v>
+                </c:pt>
+                <c:pt idx="3">
+                  <c:v>ERC20_total_ether_sent</c:v>
+                </c:pt>
+                <c:pt idx="4">
+                  <c:v>ERC20_most_rec_token_type_Unknown</c:v>
+                </c:pt>
+              </c:strCache>
+            </c:strRef>
           </c:cat>
           <c:val>
             <c:numRef>
@@ -1070,41 +1000,28 @@
                   <c:v>0.68</c:v>
                 </c:pt>
                 <c:pt idx="4">
-                  <c:v>0.56</c:v>
+                  <c:v>0.56000000000000005</c:v>
                 </c:pt>
               </c:numCache>
             </c:numRef>
           </c:val>
+          <c:extLst>
+            <c:ext xmlns:c16="http://schemas.microsoft.com/office/drawing/2014/chart" uri="{C3380CC4-5D6E-409C-BE32-E72D297353CC}">
+              <c16:uniqueId val="{00000000-EF94-43BE-A619-AB961A4559F1}"/>
+            </c:ext>
+          </c:extLst>
         </c:ser>
         <c:dLbls>
-          <c:numFmt formatCode="0.00" sourceLinked="0"/>
-          <c:txPr>
-            <a:bodyPr/>
-            <a:lstStyle/>
-            <a:p>
-              <a:pPr>
-                <a:defRPr b="0" i="0" strike="noStrike" sz="1400" u="none">
-                  <a:solidFill>
-                    <a:srgbClr val="6B6B6B"/>
-                  </a:solidFill>
-                  <a:latin typeface="+mn-lt"/>
-                </a:defRPr>
-              </a:pPr>
-            </a:p>
-          </c:txPr>
           <c:showLegendKey val="0"/>
           <c:showVal val="1"/>
           <c:showCatName val="0"/>
           <c:showSerName val="0"/>
           <c:showPercent val="0"/>
           <c:showBubbleSize val="0"/>
-          <c:showLeaderLines val="0"/>
         </c:dLbls>
         <c:gapWidth val="45"/>
-        <c:overlap val="0"/>
         <c:axId val="2094734554"/>
         <c:axId val="2094734552"/>
-        <c:axId val="2094734556"/>
       </c:barChart>
       <c:catAx>
         <c:axId val="2094734554"/>
@@ -1145,6 +1062,7 @@
         <c:crosses val="autoZero"/>
         <c:auto val="1"/>
         <c:lblAlgn val="ctr"/>
+        <c:lblOffset val="100"/>
         <c:noMultiLvlLbl val="1"/>
       </c:catAx>
       <c:valAx>
@@ -1155,7 +1073,7 @@
           <c:min val="0"/>
         </c:scaling>
         <c:delete val="0"/>
-        <c:axPos val="b"/>
+        <c:axPos val="t"/>
         <c:majorGridlines>
           <c:spPr>
             <a:ln w="6350" cap="flat">
@@ -1182,7 +1100,7 @@
                   </a:defRPr>
                 </a:pPr>
                 <a:r>
-                  <a:rPr sz="1400" b="0" i="0" u="none" strike="noStrike">
+                  <a:rPr lang="en-IN" sz="1400" b="0" i="0" u="none" strike="noStrike">
                     <a:solidFill>
                       <a:srgbClr val="6B6B6B"/>
                     </a:solidFill>
@@ -1193,7 +1111,6 @@
               </a:p>
             </c:rich>
           </c:tx>
-          <c:layout/>
           <c:overlay val="0"/>
         </c:title>
         <c:numFmt formatCode="0" sourceLinked="0"/>
@@ -1237,6 +1154,7 @@
     </c:plotArea>
     <c:plotVisOnly val="1"/>
     <c:dispBlanksAs val="span"/>
+    <c:showDLblsOverMax val="1"/>
   </c:chart>
   <c:spPr>
     <a:noFill/>
@@ -1273,234 +1191,10 @@
           <a:chExt cx="0" cy="0"/>
         </a:xfrm>
       </p:grpSpPr>
-      <p:sp>
-        <p:nvSpPr>
-          <p:cNvPr id="2" name="Header Placeholder 1"/>
-          <p:cNvSpPr>
-            <a:spLocks noGrp="1"/>
-          </p:cNvSpPr>
-          <p:nvPr>
-            <p:ph type="hdr" sz="quarter"/>
-          </p:nvPr>
-        </p:nvSpPr>
-        <p:spPr>
-          <a:xfrm>
-            <a:off x="0" y="0"/>
-            <a:ext cx="2971800" cy="458788"/>
-          </a:xfrm>
-          <a:prstGeom prst="rect">
-            <a:avLst/>
-          </a:prstGeom>
-        </p:spPr>
-        <p:txBody>
-          <a:bodyPr vert="horz" lIns="91440" tIns="45720" rIns="91440" bIns="45720" rtlCol="0"/>
-          <a:lstStyle>
-            <a:lvl1pPr algn="l">
-              <a:defRPr sz="1200"/>
-            </a:lvl1pPr>
-          </a:lstStyle>
-          <a:p>
-            <a:endParaRPr lang="en-US"/>
-          </a:p>
-        </p:txBody>
-      </p:sp>
-      <p:sp>
-        <p:nvSpPr>
-          <p:cNvPr id="3" name="Date Placeholder 2"/>
-          <p:cNvSpPr>
-            <a:spLocks noGrp="1"/>
-          </p:cNvSpPr>
-          <p:nvPr>
-            <p:ph type="dt" idx="1"/>
-          </p:nvPr>
-        </p:nvSpPr>
-        <p:spPr>
-          <a:xfrm>
-            <a:off x="3884613" y="0"/>
-            <a:ext cx="2971800" cy="458788"/>
-          </a:xfrm>
-          <a:prstGeom prst="rect">
-            <a:avLst/>
-          </a:prstGeom>
-        </p:spPr>
-        <p:txBody>
-          <a:bodyPr vert="horz" lIns="91440" tIns="45720" rIns="91440" bIns="45720" rtlCol="0"/>
-          <a:lstStyle>
-            <a:lvl1pPr algn="r">
-              <a:defRPr sz="1200"/>
-            </a:lvl1pPr>
-          </a:lstStyle>
-          <a:p>
-            <a:fld id="{5282F153-3F37-0F45-9E97-73ACFA13230C}" type="datetimeFigureOut">
-              <a:rPr lang="en-US"/>
-              <a:t>7/23/19</a:t>
-            </a:fld>
-            <a:endParaRPr lang="en-US"/>
-          </a:p>
-        </p:txBody>
-      </p:sp>
-      <p:sp>
-        <p:nvSpPr>
-          <p:cNvPr id="4" name="Slide Image Placeholder 3"/>
-          <p:cNvSpPr>
-            <a:spLocks noGrp="1" noRot="1" noChangeAspect="1"/>
-          </p:cNvSpPr>
-          <p:nvPr>
-            <p:ph type="sldImg" idx="2"/>
-          </p:nvPr>
-        </p:nvSpPr>
-        <p:spPr>
-          <a:xfrm>
-            <a:off x="685800" y="1143000"/>
-            <a:ext cx="5486400" cy="3086100"/>
-          </a:xfrm>
-          <a:prstGeom prst="rect">
-            <a:avLst/>
-          </a:prstGeom>
-          <a:noFill/>
-          <a:ln w="12700">
-            <a:solidFill>
-              <a:prstClr val="black"/>
-            </a:solidFill>
-          </a:ln>
-        </p:spPr>
-        <p:txBody>
-          <a:bodyPr vert="horz" lIns="91440" tIns="45720" rIns="91440" bIns="45720" rtlCol="0" anchor="ctr"/>
-          <a:lstStyle/>
-          <a:p>
-            <a:endParaRPr lang="en-US"/>
-          </a:p>
-        </p:txBody>
-      </p:sp>
-      <p:sp>
-        <p:nvSpPr>
-          <p:cNvPr id="5" name="Notes Placeholder 4"/>
-          <p:cNvSpPr>
-            <a:spLocks noGrp="1"/>
-          </p:cNvSpPr>
-          <p:nvPr>
-            <p:ph type="body" sz="quarter" idx="3"/>
-          </p:nvPr>
-        </p:nvSpPr>
-        <p:spPr>
-          <a:xfrm>
-            <a:off x="685800" y="4400550"/>
-            <a:ext cx="5486400" cy="3600450"/>
-          </a:xfrm>
-          <a:prstGeom prst="rect">
-            <a:avLst/>
-          </a:prstGeom>
-        </p:spPr>
-        <p:txBody>
-          <a:bodyPr vert="horz" lIns="91440" tIns="45720" rIns="91440" bIns="45720" rtlCol="0"/>
-          <a:lstStyle/>
-          <a:p>
-            <a:pPr lvl="0"/>
-            <a:r>
-              <a:rPr lang="en-US"/>
-              <a:t>Click to edit Master text styles</a:t>
-            </a:r>
-          </a:p>
-          <a:p>
-            <a:pPr lvl="1"/>
-            <a:r>
-              <a:rPr lang="en-US"/>
-              <a:t>Second level</a:t>
-            </a:r>
-          </a:p>
-          <a:p>
-            <a:pPr lvl="2"/>
-            <a:r>
-              <a:rPr lang="en-US"/>
-              <a:t>Third level</a:t>
-            </a:r>
-          </a:p>
-          <a:p>
-            <a:pPr lvl="3"/>
-            <a:r>
-              <a:rPr lang="en-US"/>
-              <a:t>Fourth level</a:t>
-            </a:r>
-          </a:p>
-          <a:p>
-            <a:pPr lvl="4"/>
-            <a:r>
-              <a:rPr lang="en-US"/>
-              <a:t>Fifth level</a:t>
-            </a:r>
-          </a:p>
-        </p:txBody>
-      </p:sp>
-      <p:sp>
-        <p:nvSpPr>
-          <p:cNvPr id="6" name="Footer Placeholder 5"/>
-          <p:cNvSpPr>
-            <a:spLocks noGrp="1"/>
-          </p:cNvSpPr>
-          <p:nvPr>
-            <p:ph type="ftr" sz="quarter" idx="4"/>
-          </p:nvPr>
-        </p:nvSpPr>
-        <p:spPr>
-          <a:xfrm>
-            <a:off x="0" y="8685213"/>
-            <a:ext cx="2971800" cy="458787"/>
-          </a:xfrm>
-          <a:prstGeom prst="rect">
-            <a:avLst/>
-          </a:prstGeom>
-        </p:spPr>
-        <p:txBody>
-          <a:bodyPr vert="horz" lIns="91440" tIns="45720" rIns="91440" bIns="45720" rtlCol="0" anchor="b"/>
-          <a:lstStyle>
-            <a:lvl1pPr algn="l">
-              <a:defRPr sz="1200"/>
-            </a:lvl1pPr>
-          </a:lstStyle>
-          <a:p>
-            <a:endParaRPr lang="en-US"/>
-          </a:p>
-        </p:txBody>
-      </p:sp>
-      <p:sp>
-        <p:nvSpPr>
-          <p:cNvPr id="7" name="Slide Number Placeholder 6"/>
-          <p:cNvSpPr>
-            <a:spLocks noGrp="1"/>
-          </p:cNvSpPr>
-          <p:nvPr>
-            <p:ph type="sldNum" sz="quarter" idx="5"/>
-          </p:nvPr>
-        </p:nvSpPr>
-        <p:spPr>
-          <a:xfrm>
-            <a:off x="3884613" y="8685213"/>
-            <a:ext cx="2971800" cy="458787"/>
-          </a:xfrm>
-          <a:prstGeom prst="rect">
-            <a:avLst/>
-          </a:prstGeom>
-        </p:spPr>
-        <p:txBody>
-          <a:bodyPr vert="horz" lIns="91440" tIns="45720" rIns="91440" bIns="45720" rtlCol="0" anchor="b"/>
-          <a:lstStyle>
-            <a:lvl1pPr algn="r">
-              <a:defRPr sz="1200"/>
-            </a:lvl1pPr>
-          </a:lstStyle>
-          <a:p>
-            <a:fld id="{CE5E9CC1-C706-0F49-92D6-E571CC5EEA8F}" type="slidenum">
-              <a:rPr lang="en-US"/>
-              <a:t>‹#›</a:t>
-            </a:fld>
-            <a:endParaRPr lang="en-US"/>
-          </a:p>
-        </p:txBody>
-      </p:sp>
     </p:spTree>
     <p:extLst>
       <p:ext uri="{BB962C8B-B14F-4D97-AF65-F5344CB8AC3E}">
-        <p14:creationId xmlns:p14="http://schemas.microsoft.com/office/powerpoint/2010/main" val="1024086991"/>
+        <p14:creationId xmlns:p14="http://schemas.microsoft.com/office/powerpoint/2010/main" val="83609488"/>
       </p:ext>
     </p:extLst>
   </p:cSld>
@@ -1648,7 +1342,6 @@
               <a:rPr lang="en-US" dirty="0"/>
               <a:t>Introduce the project, the two presenters and the guide.</a:t>
             </a:r>
-            <a:endParaRPr lang="en-US" dirty="0"/>
           </a:p>
         </p:txBody>
       </p:sp>
@@ -1736,7 +1429,6 @@
               <a:rPr lang="en-US" dirty="0"/>
               <a:t>SHAP shows what the model uses; it does not show what causes fraud.</a:t>
             </a:r>
-            <a:endParaRPr lang="en-US" dirty="0"/>
           </a:p>
         </p:txBody>
       </p:sp>
@@ -1824,7 +1516,6 @@
               <a:rPr lang="en-US" dirty="0"/>
               <a:t>The demo files are synthetic; the 6.67% flagged rate is not a fraud rate or an accuracy measure.</a:t>
             </a:r>
-            <a:endParaRPr lang="en-US" dirty="0"/>
           </a:p>
         </p:txBody>
       </p:sp>
@@ -1912,7 +1603,6 @@
               <a:rPr lang="en-US" dirty="0"/>
               <a:t>Be upfront: repeated patterns and a single split make the scores optimistic.</a:t>
             </a:r>
-            <a:endParaRPr lang="en-US" dirty="0"/>
           </a:p>
         </p:txBody>
       </p:sp>
@@ -2000,7 +1690,6 @@
               <a:rPr lang="en-US" dirty="0"/>
               <a:t>Next steps: temporal validation, de-duplication, calibration and a secure monitored API.</a:t>
             </a:r>
-            <a:endParaRPr lang="en-US" dirty="0"/>
           </a:p>
         </p:txBody>
       </p:sp>
@@ -2088,7 +1777,6 @@
               <a:rPr lang="en-US" dirty="0"/>
               <a:t>Summarise the contribution and its limits, then invite questions.</a:t>
             </a:r>
-            <a:endParaRPr lang="en-US" dirty="0"/>
           </a:p>
         </p:txBody>
       </p:sp>
@@ -2176,7 +1864,6 @@
               <a:rPr lang="en-US" dirty="0"/>
               <a:t>Fraud on a public ledger is common, address lists are reactive, so we learn from behaviour.</a:t>
             </a:r>
-            <a:endParaRPr lang="en-US" dirty="0"/>
           </a:p>
         </p:txBody>
       </p:sp>
@@ -2264,7 +1951,6 @@
               <a:rPr lang="en-US" dirty="0"/>
               <a:t>Three objectives, and a clear scope: offline and account-level, no live deployment.</a:t>
             </a:r>
-            <a:endParaRPr lang="en-US" dirty="0"/>
           </a:p>
         </p:txBody>
       </p:sp>
@@ -2352,7 +2038,6 @@
               <a:rPr lang="en-US" dirty="0"/>
               <a:t>Prior work shows tree models and embeddings work; our gap is diagnostics, train-only decisions, SHAP and reuse.</a:t>
             </a:r>
-            <a:endParaRPr lang="en-US" dirty="0"/>
           </a:p>
         </p:txBody>
       </p:sp>
@@ -2440,7 +2125,6 @@
               <a:rPr lang="en-US" dirty="0"/>
               <a:t>Cleaning left 9,816 accounts, 22.2% labelled fraud; the stratified split uses seed 42.</a:t>
             </a:r>
-            <a:endParaRPr lang="en-US" dirty="0"/>
           </a:p>
         </p:txBody>
       </p:sp>
@@ -2528,7 +2212,6 @@
               <a:rPr lang="en-US" dirty="0"/>
               <a:t>Walk through the five KDD phases exactly as applied in the notebook.</a:t>
             </a:r>
-            <a:endParaRPr lang="en-US" dirty="0"/>
           </a:p>
         </p:txBody>
       </p:sp>
@@ -2616,7 +2299,6 @@
               <a:rPr lang="en-US" dirty="0"/>
               <a:t>All transformation settings are learned on the training data only and reused for new records.</a:t>
             </a:r>
-            <a:endParaRPr lang="en-US" dirty="0"/>
           </a:p>
         </p:txBody>
       </p:sp>
@@ -2704,7 +2386,6 @@
               <a:rPr lang="en-US" dirty="0"/>
               <a:t>XGBoost and Random Forest are essentially equal on PR-AUC; the threshold was chosen without test data.</a:t>
             </a:r>
-            <a:endParaRPr lang="en-US" dirty="0"/>
           </a:p>
         </p:txBody>
       </p:sp>
@@ -2792,7 +2473,6 @@
               <a:rPr lang="en-US" dirty="0"/>
               <a:t>The test set was used once: 12 fraud accounts missed and 3 false alarms.</a:t>
             </a:r>
-            <a:endParaRPr lang="en-US" dirty="0"/>
           </a:p>
         </p:txBody>
       </p:sp>
@@ -2870,6 +2550,7 @@
         <a:solidFill>
           <a:srgbClr val="F7F7F5"/>
         </a:solidFill>
+        <a:effectLst/>
       </p:bgPr>
     </p:bg>
     <p:spTree>
@@ -2889,9 +2570,11 @@
       <p:sp>
         <p:nvSpPr>
           <p:cNvPr id="2" name="Text 0"/>
-          <p:cNvSpPr/>
+          <p:cNvSpPr>
+            <a:spLocks noGrp="1"/>
+          </p:cNvSpPr>
           <p:nvPr>
-            <p:ph idx="100" type="title" hasCustomPrompt="1"/>
+            <p:ph type="title" idx="100" hasCustomPrompt="1"/>
           </p:nvPr>
         </p:nvSpPr>
         <p:spPr>
@@ -2908,7 +2591,7 @@
         <p:txBody>
           <a:bodyPr wrap="square" rtlCol="0"/>
           <a:lstStyle>
-            <a:lvl1pPr algn="l" indent="0" marL="0">
+            <a:lvl1pPr marL="0" indent="0" algn="l">
               <a:buNone/>
               <a:defRPr lang="en-US" sz="2800" b="1" dirty="0">
                 <a:solidFill>
@@ -2918,7 +2601,7 @@
             </a:lvl1pPr>
           </a:lstStyle>
           <a:p>
-            <a:pPr algn="l" indent="0" marL="0">
+            <a:pPr marL="0" indent="0" algn="l">
               <a:buNone/>
             </a:pPr>
             <a:endParaRPr lang="en-US" sz="2800" dirty="0"/>
@@ -2968,7 +2651,7 @@
           </a:prstGeom>
           <a:extLst>
             <a:ext uri="{C572A759-6A51-4108-AA02-DFA0A04FC94B}">
-              <ma14:wrappingTextBoxFlag xmlns:ma14="http://schemas.microsoft.com/office/mac/drawingml/2011/main" val="0"/>
+              <ma14:wrappingTextBoxFlag xmlns:ma14="http://schemas.microsoft.com/office/mac/drawingml/2011/main" xmlns="" val="0"/>
             </a:ext>
           </a:extLst>
         </p:spPr>
@@ -2986,8 +2669,8 @@
           <a:p>
             <a:pPr algn="r"/>
             <a:fld id="{F7021451-1387-4CA6-816F-3879F97B5CBC}" type="slidenum">
-              <a:rPr b="0" lang="en-US"/>
-              <a:t>1002</a:t>
+              <a:rPr lang="en-US" b="0"/>
+              <a:t>‹#›</a:t>
             </a:fld>
             <a:endParaRPr lang="en-US"/>
           </a:p>
@@ -3009,6 +2692,7 @@
         <a:solidFill>
           <a:srgbClr val="F7F7F5"/>
         </a:solidFill>
+        <a:effectLst/>
       </p:bgPr>
     </p:bg>
     <p:spTree>
@@ -3028,9 +2712,11 @@
       <p:sp>
         <p:nvSpPr>
           <p:cNvPr id="2" name="Text 0"/>
-          <p:cNvSpPr/>
+          <p:cNvSpPr>
+            <a:spLocks noGrp="1"/>
+          </p:cNvSpPr>
           <p:nvPr>
-            <p:ph idx="100" type="title" hasCustomPrompt="1"/>
+            <p:ph type="title" idx="100" hasCustomPrompt="1"/>
           </p:nvPr>
         </p:nvSpPr>
         <p:spPr>
@@ -3047,7 +2733,7 @@
         <p:txBody>
           <a:bodyPr wrap="square" rtlCol="0"/>
           <a:lstStyle>
-            <a:lvl1pPr algn="l" indent="0" marL="0">
+            <a:lvl1pPr marL="0" indent="0" algn="l">
               <a:buNone/>
               <a:defRPr lang="en-US" sz="2800" b="1" dirty="0">
                 <a:solidFill>
@@ -3057,7 +2743,7 @@
             </a:lvl1pPr>
           </a:lstStyle>
           <a:p>
-            <a:pPr algn="l" indent="0" marL="0">
+            <a:pPr marL="0" indent="0" algn="l">
               <a:buNone/>
             </a:pPr>
             <a:endParaRPr lang="en-US" sz="2800" dirty="0"/>
@@ -3107,7 +2793,7 @@
           </a:prstGeom>
           <a:extLst>
             <a:ext uri="{C572A759-6A51-4108-AA02-DFA0A04FC94B}">
-              <ma14:wrappingTextBoxFlag xmlns:ma14="http://schemas.microsoft.com/office/mac/drawingml/2011/main" val="0"/>
+              <ma14:wrappingTextBoxFlag xmlns:ma14="http://schemas.microsoft.com/office/mac/drawingml/2011/main" xmlns="" val="0"/>
             </a:ext>
           </a:extLst>
         </p:spPr>
@@ -3125,8 +2811,8 @@
           <a:p>
             <a:pPr algn="r"/>
             <a:fld id="{F7021451-1387-4CA6-816F-3879F97B5CBC}" type="slidenum">
-              <a:rPr b="0" lang="en-US"/>
-              <a:t>1003</a:t>
+              <a:rPr lang="en-US" b="0"/>
+              <a:t>‹#›</a:t>
             </a:fld>
             <a:endParaRPr lang="en-US"/>
           </a:p>
@@ -3143,6 +2829,11 @@
 <file path=ppt/slideMasters/slideMaster1.xml><?xml version="1.0" encoding="utf-8"?>
 <p:sldMaster xmlns:a="http://schemas.openxmlformats.org/drawingml/2006/main" xmlns:r="http://schemas.openxmlformats.org/officeDocument/2006/relationships" xmlns:p="http://schemas.openxmlformats.org/presentationml/2006/main">
   <p:cSld>
+    <p:bg>
+      <p:bgRef idx="1001">
+        <a:schemeClr val="bg1"/>
+      </p:bgRef>
+    </p:bg>
     <p:spTree>
       <p:nvGrpSpPr>
         <p:cNvPr id="1" name=""/>
@@ -3177,7 +2868,7 @@
           </a:prstGeom>
           <a:extLst>
             <a:ext uri="{C572A759-6A51-4108-AA02-DFA0A04FC94B}">
-              <ma14:wrappingTextBoxFlag xmlns:ma14="http://schemas.microsoft.com/office/mac/drawingml/2011/main" val="0"/>
+              <ma14:wrappingTextBoxFlag xmlns:ma14="http://schemas.microsoft.com/office/mac/drawingml/2011/main" xmlns="" val="0"/>
             </a:ext>
           </a:extLst>
         </p:spPr>
@@ -3195,8 +2886,8 @@
           <a:p>
             <a:pPr algn="r"/>
             <a:fld id="{F7021451-1387-4CA6-816F-3879F97B5CBC}" type="slidenum">
-              <a:rPr b="0" lang="en-US"/>
-              <a:t>null</a:t>
+              <a:rPr lang="en-US" b="0"/>
+              <a:t>‹#›</a:t>
             </a:fld>
             <a:endParaRPr lang="en-US"/>
           </a:p>
@@ -3483,14 +3174,18 @@
       </p:grpSpPr>
       <p:sp>
         <p:nvSpPr>
-          <p:cNvPr id="2" name="Text 0"/>
-          <p:cNvSpPr txBox="1"/>
-          <p:nvPr/>
-        </p:nvSpPr>
-        <p:spPr>
-          <a:xfrm>
-            <a:off x="548640" y="685800"/>
-            <a:ext cx="8046720" cy="320040"/>
+          <p:cNvPr id="3" name="Text 0"/>
+          <p:cNvSpPr>
+            <a:spLocks noGrp="1"/>
+          </p:cNvSpPr>
+          <p:nvPr>
+            <p:ph type="title" idx="100" hasCustomPrompt="1"/>
+          </p:nvPr>
+        </p:nvSpPr>
+        <p:spPr>
+          <a:xfrm>
+            <a:off x="548640" y="910161"/>
+            <a:ext cx="8046720" cy="1417320"/>
           </a:xfrm>
           <a:prstGeom prst="rect">
             <a:avLst/>
@@ -3499,36 +3194,34 @@
           <a:ln/>
         </p:spPr>
         <p:txBody>
-          <a:bodyPr wrap="square" lIns="0" tIns="0" rIns="0" bIns="0" rtlCol="0" anchor="ctr"/>
+          <a:bodyPr wrap="square" lIns="0" tIns="0" rIns="0" bIns="0" rtlCol="0" anchor="b"/>
           <a:lstStyle/>
           <a:p>
-            <a:pPr indent="0" marL="0">
+            <a:pPr marL="0" indent="0" algn="l">
               <a:buNone/>
             </a:pPr>
             <a:r>
-              <a:rPr lang="en-US" sz="1400" b="1" dirty="0">
-                <a:solidFill>
-                  <a:schemeClr val="accent2"/>
+              <a:rPr lang="en-US" sz="2800" b="1" dirty="0">
+                <a:solidFill>
+                  <a:schemeClr val="tx2"/>
                 </a:solidFill>
               </a:rPr>
-              <a:t>Final-Year B.Tech Project  |  Computer Science and Engineering</a:t>
-            </a:r>
-            <a:endParaRPr lang="en-US" sz="1400" dirty="0"/>
-          </a:p>
-        </p:txBody>
-      </p:sp>
-      <p:sp>
-        <p:nvSpPr>
-          <p:cNvPr id="3" name="Text 0"/>
-          <p:cNvSpPr/>
-          <p:nvPr>
-            <p:ph idx="100" type="title" hasCustomPrompt="1"/>
-          </p:nvPr>
-        </p:nvSpPr>
-        <p:spPr>
-          <a:xfrm>
-            <a:off x="548640" y="1188720"/>
-            <a:ext cx="8046720" cy="1417320"/>
+              <a:t>Detecting Fraudulent Ethereum Accounts from On-Chain Transaction Behaviour Using Machine Learning and the KDD Process</a:t>
+            </a:r>
+            <a:endParaRPr lang="en-US" sz="2800" dirty="0"/>
+          </a:p>
+        </p:txBody>
+      </p:sp>
+      <p:sp>
+        <p:nvSpPr>
+          <p:cNvPr id="4" name="Presenters"/>
+          <p:cNvSpPr txBox="1"/>
+          <p:nvPr/>
+        </p:nvSpPr>
+        <p:spPr>
+          <a:xfrm>
+            <a:off x="548640" y="2971800"/>
+            <a:ext cx="8046720" cy="1371600"/>
           </a:xfrm>
           <a:prstGeom prst="rect">
             <a:avLst/>
@@ -3537,46 +3230,10 @@
           <a:ln/>
         </p:spPr>
         <p:txBody>
-          <a:bodyPr wrap="square" lIns="0" tIns="0" rIns="0" bIns="0" rtlCol="0" anchor="b"/>
-          <a:lstStyle/>
-          <a:p>
-            <a:pPr algn="l" indent="0" marL="0">
-              <a:buNone/>
-            </a:pPr>
-            <a:r>
-              <a:rPr lang="en-US" sz="2800" b="1" dirty="0">
-                <a:solidFill>
-                  <a:schemeClr val="tx2"/>
-                </a:solidFill>
-              </a:rPr>
-              <a:t>Detecting Fraudulent Ethereum Accounts from On-Chain Transaction Behaviour Using Machine Learning and the KDD Process</a:t>
-            </a:r>
-            <a:endParaRPr lang="en-US" sz="2800" dirty="0"/>
-          </a:p>
-        </p:txBody>
-      </p:sp>
-      <p:sp>
-        <p:nvSpPr>
-          <p:cNvPr id="4" name="Presenters"/>
-          <p:cNvSpPr txBox="1"/>
-          <p:nvPr/>
-        </p:nvSpPr>
-        <p:spPr>
-          <a:xfrm>
-            <a:off x="548640" y="2971800"/>
-            <a:ext cx="8046720" cy="1371600"/>
-          </a:xfrm>
-          <a:prstGeom prst="rect">
-            <a:avLst/>
-          </a:prstGeom>
-          <a:noFill/>
-          <a:ln/>
-        </p:spPr>
-        <p:txBody>
           <a:bodyPr wrap="square" lIns="0" tIns="0" rIns="0" bIns="0" rtlCol="0" anchor="t"/>
           <a:lstStyle/>
           <a:p>
-            <a:pPr indent="0" marL="0">
+            <a:pPr marL="0" indent="0">
               <a:spcAft>
                 <a:spcPts val="600"/>
               </a:spcAft>
@@ -3588,12 +3245,12 @@
                   <a:schemeClr val="tx2"/>
                 </a:solidFill>
               </a:rPr>
-              <a:t>Rugved Gadge (PRN 23070521051) and Aman Shrikhande (PRN 23070521010)</a:t>
+              <a:t>Rugved Gadge (PRN 23070521051)</a:t>
             </a:r>
             <a:endParaRPr lang="en-US" sz="1800" dirty="0"/>
           </a:p>
           <a:p>
-            <a:pPr indent="0" marL="0">
+            <a:pPr marL="0" indent="0">
               <a:spcAft>
                 <a:spcPts val="600"/>
               </a:spcAft>
@@ -3610,7 +3267,7 @@
             <a:endParaRPr lang="en-US" sz="1800" dirty="0"/>
           </a:p>
           <a:p>
-            <a:pPr indent="0" marL="0">
+            <a:pPr marL="0" indent="0">
               <a:buNone/>
             </a:pPr>
             <a:r>
@@ -3619,7 +3276,7 @@
                   <a:schemeClr val="tx1"/>
                 </a:solidFill>
               </a:rPr>
-              <a:t>Guide: [Insert Guide Name]      Date: October 2026</a:t>
+              <a:t>Date: October 2026</a:t>
             </a:r>
             <a:endParaRPr lang="en-US" sz="1800" dirty="0"/>
           </a:p>
@@ -3645,7 +3302,7 @@
           </a:prstGeom>
           <a:extLst>
             <a:ext uri="{C572A759-6A51-4108-AA02-DFA0A04FC94B}">
-              <ma14:wrappingTextBoxFlag xmlns:ma14="http://schemas.microsoft.com/office/mac/drawingml/2011/main" val="0"/>
+              <ma14:wrappingTextBoxFlag xmlns:ma14="http://schemas.microsoft.com/office/mac/drawingml/2011/main" xmlns="" val="0"/>
             </a:ext>
           </a:extLst>
         </p:spPr>
@@ -3663,7 +3320,7 @@
           <a:p>
             <a:pPr algn="r"/>
             <a:fld id="{F7021451-1387-4CA6-816F-3879F97B5CBC}" type="slidenum">
-              <a:rPr b="0" lang="en-US"/>
+              <a:rPr lang="en-US" b="0"/>
               <a:t>1</a:t>
             </a:fld>
             <a:endParaRPr lang="en-US"/>
@@ -3698,9 +3355,11 @@
       <p:sp>
         <p:nvSpPr>
           <p:cNvPr id="2" name="Text 0"/>
-          <p:cNvSpPr/>
+          <p:cNvSpPr>
+            <a:spLocks noGrp="1"/>
+          </p:cNvSpPr>
           <p:nvPr>
-            <p:ph idx="100" type="title" hasCustomPrompt="1"/>
+            <p:ph type="title" idx="100" hasCustomPrompt="1"/>
           </p:nvPr>
         </p:nvSpPr>
         <p:spPr>
@@ -3718,7 +3377,7 @@
           <a:bodyPr wrap="square" lIns="0" tIns="0" rIns="0" bIns="0" rtlCol="0" anchor="ctr"/>
           <a:lstStyle/>
           <a:p>
-            <a:pPr algn="l" indent="0" marL="0">
+            <a:pPr marL="0" indent="0" algn="l">
               <a:buNone/>
             </a:pPr>
             <a:r>
@@ -3811,7 +3470,7 @@
       </p:sp>
       <p:graphicFrame>
         <p:nvGraphicFramePr>
-          <p:cNvPr id="5" name="Chart 0" descr=""/>
+          <p:cNvPr id="5" name="Chart 0"/>
           <p:cNvGraphicFramePr/>
           <p:nvPr/>
         </p:nvGraphicFramePr>
@@ -3819,9 +3478,9 @@
           <a:off x="548640" y="2423160"/>
           <a:ext cx="8046720" cy="2194560"/>
         </p:xfrm>
-        <a:graphic xmlns:a="http://schemas.openxmlformats.org/drawingml/2006/main">
+        <a:graphic>
           <a:graphicData uri="http://schemas.openxmlformats.org/drawingml/2006/chart">
-            <c:chart xmlns:c="http://schemas.openxmlformats.org/drawingml/2006/chart" r:id="rId1"/>
+            <c:chart xmlns:c="http://schemas.openxmlformats.org/drawingml/2006/chart" xmlns:r="http://schemas.openxmlformats.org/officeDocument/2006/relationships" r:id="rId3"/>
           </a:graphicData>
         </a:graphic>
       </p:graphicFrame>
@@ -3845,7 +3504,7 @@
           </a:prstGeom>
           <a:extLst>
             <a:ext uri="{C572A759-6A51-4108-AA02-DFA0A04FC94B}">
-              <ma14:wrappingTextBoxFlag xmlns:ma14="http://schemas.microsoft.com/office/mac/drawingml/2011/main" val="0"/>
+              <ma14:wrappingTextBoxFlag xmlns:ma14="http://schemas.microsoft.com/office/mac/drawingml/2011/main" xmlns="" val="0"/>
             </a:ext>
           </a:extLst>
         </p:spPr>
@@ -3863,7 +3522,7 @@
           <a:p>
             <a:pPr algn="r"/>
             <a:fld id="{F7021451-1387-4CA6-816F-3879F97B5CBC}" type="slidenum">
-              <a:rPr b="0" lang="en-US"/>
+              <a:rPr lang="en-US" b="0"/>
               <a:t>10</a:t>
             </a:fld>
             <a:endParaRPr lang="en-US"/>
@@ -3898,9 +3557,11 @@
       <p:sp>
         <p:nvSpPr>
           <p:cNvPr id="2" name="Text 0"/>
-          <p:cNvSpPr/>
+          <p:cNvSpPr>
+            <a:spLocks noGrp="1"/>
+          </p:cNvSpPr>
           <p:nvPr>
-            <p:ph idx="100" type="title" hasCustomPrompt="1"/>
+            <p:ph type="title" idx="100" hasCustomPrompt="1"/>
           </p:nvPr>
         </p:nvSpPr>
         <p:spPr>
@@ -3918,7 +3579,7 @@
           <a:bodyPr wrap="square" lIns="0" tIns="0" rIns="0" bIns="0" rtlCol="0" anchor="ctr"/>
           <a:lstStyle/>
           <a:p>
-            <a:pPr algn="l" indent="0" marL="0">
+            <a:pPr marL="0" indent="0" algn="l">
               <a:buNone/>
             </a:pPr>
             <a:r>
@@ -3981,7 +3642,7 @@
           <a:bodyPr wrap="square" lIns="0" tIns="0" rIns="0" bIns="0" rtlCol="0" anchor="ctr"/>
           <a:lstStyle/>
           <a:p>
-            <a:pPr algn="ctr" indent="0" marL="0">
+            <a:pPr marL="0" indent="0" algn="ctr">
               <a:buNone/>
             </a:pPr>
             <a:r>
@@ -4068,7 +3729,7 @@
           <a:bodyPr wrap="square" lIns="0" tIns="0" rIns="0" bIns="0" rtlCol="0" anchor="ctr"/>
           <a:lstStyle/>
           <a:p>
-            <a:pPr algn="ctr" indent="0" marL="0">
+            <a:pPr marL="0" indent="0" algn="ctr">
               <a:buNone/>
             </a:pPr>
             <a:r>
@@ -4082,7 +3743,7 @@
             <a:endParaRPr lang="en-US" sz="1400" dirty="0"/>
           </a:p>
           <a:p>
-            <a:pPr algn="ctr" indent="0" marL="0">
+            <a:pPr marL="0" indent="0" algn="ctr">
               <a:buNone/>
             </a:pPr>
             <a:r>
@@ -4169,7 +3830,7 @@
           <a:bodyPr wrap="square" lIns="0" tIns="0" rIns="0" bIns="0" rtlCol="0" anchor="ctr"/>
           <a:lstStyle/>
           <a:p>
-            <a:pPr algn="ctr" indent="0" marL="0">
+            <a:pPr marL="0" indent="0" algn="ctr">
               <a:buNone/>
             </a:pPr>
             <a:r>
@@ -4256,7 +3917,7 @@
           <a:bodyPr wrap="square" lIns="0" tIns="0" rIns="0" bIns="0" rtlCol="0" anchor="ctr"/>
           <a:lstStyle/>
           <a:p>
-            <a:pPr algn="ctr" indent="0" marL="0">
+            <a:pPr marL="0" indent="0" algn="ctr">
               <a:buNone/>
             </a:pPr>
             <a:r>
@@ -4343,7 +4004,7 @@
           <a:bodyPr wrap="square" lIns="0" tIns="0" rIns="0" bIns="0" rtlCol="0" anchor="ctr"/>
           <a:lstStyle/>
           <a:p>
-            <a:pPr algn="ctr" indent="0" marL="0">
+            <a:pPr marL="0" indent="0" algn="ctr">
               <a:buNone/>
             </a:pPr>
             <a:r>
@@ -4430,7 +4091,7 @@
           <a:bodyPr wrap="square" lIns="0" tIns="0" rIns="0" bIns="0" rtlCol="0" anchor="ctr"/>
           <a:lstStyle/>
           <a:p>
-            <a:pPr algn="ctr" indent="0" marL="0">
+            <a:pPr marL="0" indent="0" algn="ctr">
               <a:buNone/>
             </a:pPr>
             <a:r>
@@ -4517,7 +4178,7 @@
           <a:bodyPr wrap="square" lIns="0" tIns="0" rIns="0" bIns="0" rtlCol="0" anchor="ctr"/>
           <a:lstStyle/>
           <a:p>
-            <a:pPr algn="ctr" indent="0" marL="0">
+            <a:pPr marL="0" indent="0" algn="ctr">
               <a:buNone/>
             </a:pPr>
             <a:r>
@@ -4580,7 +4241,7 @@
           <a:bodyPr wrap="square" lIns="0" tIns="0" rIns="0" bIns="0" rtlCol="0" anchor="ctr"/>
           <a:lstStyle/>
           <a:p>
-            <a:pPr indent="0" marL="0">
+            <a:pPr marL="0" indent="0">
               <a:buNone/>
             </a:pPr>
             <a:r>
@@ -4591,9 +4252,6 @@
               </a:rPr>
               <a:t>Demo uses SYNTHETIC files </a:t>
             </a:r>
-            <a:pPr indent="0" marL="0">
-              <a:buNone/>
-            </a:pPr>
             <a:r>
               <a:rPr lang="en-US" sz="1400" dirty="0">
                 <a:solidFill>
@@ -4608,7 +4266,7 @@
       </p:sp>
       <p:sp>
         <p:nvSpPr>
-          <p:cNvPr id="25" name="Slide Number Placeholder 0"/>
+          <p:cNvPr id="3" name="Slide Number Placeholder 0"/>
           <p:cNvSpPr>
             <a:spLocks noGrp="1"/>
           </p:cNvSpPr>
@@ -4626,7 +4284,7 @@
           </a:prstGeom>
           <a:extLst>
             <a:ext uri="{C572A759-6A51-4108-AA02-DFA0A04FC94B}">
-              <ma14:wrappingTextBoxFlag xmlns:ma14="http://schemas.microsoft.com/office/mac/drawingml/2011/main" val="0"/>
+              <ma14:wrappingTextBoxFlag xmlns:ma14="http://schemas.microsoft.com/office/mac/drawingml/2011/main" xmlns="" val="0"/>
             </a:ext>
           </a:extLst>
         </p:spPr>
@@ -4644,7 +4302,7 @@
           <a:p>
             <a:pPr algn="r"/>
             <a:fld id="{F7021451-1387-4CA6-816F-3879F97B5CBC}" type="slidenum">
-              <a:rPr b="0" lang="en-US"/>
+              <a:rPr lang="en-US" b="0"/>
               <a:t>11</a:t>
             </a:fld>
             <a:endParaRPr lang="en-US"/>
@@ -4679,9 +4337,11 @@
       <p:sp>
         <p:nvSpPr>
           <p:cNvPr id="2" name="Text 0"/>
-          <p:cNvSpPr/>
+          <p:cNvSpPr>
+            <a:spLocks noGrp="1"/>
+          </p:cNvSpPr>
           <p:nvPr>
-            <p:ph idx="100" type="title" hasCustomPrompt="1"/>
+            <p:ph type="title" idx="100" hasCustomPrompt="1"/>
           </p:nvPr>
         </p:nvSpPr>
         <p:spPr>
@@ -4699,7 +4359,7 @@
           <a:bodyPr wrap="square" lIns="0" tIns="0" rIns="0" bIns="0" rtlCol="0" anchor="ctr"/>
           <a:lstStyle/>
           <a:p>
-            <a:pPr algn="l" indent="0" marL="0">
+            <a:pPr marL="0" indent="0" algn="l">
               <a:buNone/>
             </a:pPr>
             <a:r>
@@ -4743,49 +4403,13 @@
       </p:sp>
       <p:sp>
         <p:nvSpPr>
-          <p:cNvPr id="5" name="Text 2"/>
-          <p:cNvSpPr txBox="1"/>
-          <p:nvPr/>
-        </p:nvSpPr>
-        <p:spPr>
-          <a:xfrm>
-            <a:off x="822960" y="1417320"/>
-            <a:ext cx="4937760" cy="365760"/>
-          </a:xfrm>
-          <a:prstGeom prst="rect">
-            <a:avLst/>
-          </a:prstGeom>
-          <a:noFill/>
-          <a:ln/>
-        </p:spPr>
-        <p:txBody>
-          <a:bodyPr wrap="square" lIns="0" tIns="0" rIns="0" bIns="0" rtlCol="0" anchor="ctr"/>
-          <a:lstStyle/>
-          <a:p>
-            <a:pPr indent="0" marL="0">
-              <a:buNone/>
-            </a:pPr>
-            <a:r>
-              <a:rPr lang="en-US" sz="1600" b="1" dirty="0">
-                <a:solidFill>
-                  <a:srgbClr val="B07A7A"/>
-                </a:solidFill>
-              </a:rPr>
-              <a:t>Read the results with caution</a:t>
-            </a:r>
-            <a:endParaRPr lang="en-US" sz="1600" dirty="0"/>
-          </a:p>
-        </p:txBody>
-      </p:sp>
-      <p:sp>
-        <p:nvSpPr>
           <p:cNvPr id="6" name="s12 bullets"/>
           <p:cNvSpPr txBox="1"/>
           <p:nvPr/>
         </p:nvSpPr>
         <p:spPr>
           <a:xfrm>
-            <a:off x="822960" y="1874520"/>
+            <a:off x="822960" y="1645920"/>
             <a:ext cx="4937760" cy="2560320"/>
           </a:xfrm>
           <a:prstGeom prst="rect">
@@ -4937,7 +4561,7 @@
           <a:bodyPr wrap="square" lIns="0" tIns="0" rIns="0" bIns="0" rtlCol="0" anchor="ctr"/>
           <a:lstStyle/>
           <a:p>
-            <a:pPr algn="ctr" indent="0" marL="0">
+            <a:pPr marL="0" indent="0" algn="ctr">
               <a:buNone/>
             </a:pPr>
             <a:r>
@@ -4973,7 +4597,7 @@
           <a:bodyPr wrap="square" lIns="0" tIns="0" rIns="0" bIns="0" rtlCol="0" anchor="t"/>
           <a:lstStyle/>
           <a:p>
-            <a:pPr algn="ctr" indent="0" marL="0">
+            <a:pPr marL="0" indent="0" algn="ctr">
               <a:buNone/>
             </a:pPr>
             <a:r>
@@ -5036,7 +4660,7 @@
           <a:bodyPr wrap="square" lIns="0" tIns="0" rIns="0" bIns="0" rtlCol="0" anchor="ctr"/>
           <a:lstStyle/>
           <a:p>
-            <a:pPr algn="ctr" indent="0" marL="0">
+            <a:pPr marL="0" indent="0" algn="ctr">
               <a:buNone/>
             </a:pPr>
             <a:r>
@@ -5072,7 +4696,7 @@
           <a:bodyPr wrap="square" lIns="0" tIns="0" rIns="0" bIns="0" rtlCol="0" anchor="t"/>
           <a:lstStyle/>
           <a:p>
-            <a:pPr algn="ctr" indent="0" marL="0">
+            <a:pPr marL="0" indent="0" algn="ctr">
               <a:buNone/>
             </a:pPr>
             <a:r>
@@ -5107,7 +4731,7 @@
           </a:prstGeom>
           <a:extLst>
             <a:ext uri="{C572A759-6A51-4108-AA02-DFA0A04FC94B}">
-              <ma14:wrappingTextBoxFlag xmlns:ma14="http://schemas.microsoft.com/office/mac/drawingml/2011/main" val="0"/>
+              <ma14:wrappingTextBoxFlag xmlns:ma14="http://schemas.microsoft.com/office/mac/drawingml/2011/main" xmlns="" val="0"/>
             </a:ext>
           </a:extLst>
         </p:spPr>
@@ -5125,7 +4749,7 @@
           <a:p>
             <a:pPr algn="r"/>
             <a:fld id="{F7021451-1387-4CA6-816F-3879F97B5CBC}" type="slidenum">
-              <a:rPr b="0" lang="en-US"/>
+              <a:rPr lang="en-US" b="0"/>
               <a:t>12</a:t>
             </a:fld>
             <a:endParaRPr lang="en-US"/>
@@ -5160,9 +4784,11 @@
       <p:sp>
         <p:nvSpPr>
           <p:cNvPr id="2" name="Text 0"/>
-          <p:cNvSpPr/>
+          <p:cNvSpPr>
+            <a:spLocks noGrp="1"/>
+          </p:cNvSpPr>
           <p:nvPr>
-            <p:ph idx="100" type="title" hasCustomPrompt="1"/>
+            <p:ph type="title" idx="100" hasCustomPrompt="1"/>
           </p:nvPr>
         </p:nvSpPr>
         <p:spPr>
@@ -5180,7 +4806,7 @@
           <a:bodyPr wrap="square" lIns="0" tIns="0" rIns="0" bIns="0" rtlCol="0" anchor="ctr"/>
           <a:lstStyle/>
           <a:p>
-            <a:pPr algn="l" indent="0" marL="0">
+            <a:pPr marL="0" indent="0" algn="l">
               <a:buNone/>
             </a:pPr>
             <a:r>
@@ -5268,7 +4894,7 @@
           <a:bodyPr wrap="square" lIns="0" tIns="0" rIns="0" bIns="0" rtlCol="0" anchor="ctr"/>
           <a:lstStyle/>
           <a:p>
-            <a:pPr algn="ctr" indent="0" marL="0">
+            <a:pPr marL="0" indent="0" algn="ctr">
               <a:buNone/>
             </a:pPr>
             <a:r>
@@ -5304,7 +4930,7 @@
           <a:bodyPr wrap="square" lIns="0" tIns="0" rIns="0" bIns="0" rtlCol="0" anchor="ctr"/>
           <a:lstStyle/>
           <a:p>
-            <a:pPr indent="0" marL="0">
+            <a:pPr marL="0" indent="0">
               <a:buNone/>
             </a:pPr>
             <a:r>
@@ -5392,7 +5018,7 @@
           <a:bodyPr wrap="square" lIns="0" tIns="0" rIns="0" bIns="0" rtlCol="0" anchor="ctr"/>
           <a:lstStyle/>
           <a:p>
-            <a:pPr algn="ctr" indent="0" marL="0">
+            <a:pPr marL="0" indent="0" algn="ctr">
               <a:buNone/>
             </a:pPr>
             <a:r>
@@ -5428,7 +5054,7 @@
           <a:bodyPr wrap="square" lIns="0" tIns="0" rIns="0" bIns="0" rtlCol="0" anchor="ctr"/>
           <a:lstStyle/>
           <a:p>
-            <a:pPr indent="0" marL="0">
+            <a:pPr marL="0" indent="0">
               <a:buNone/>
             </a:pPr>
             <a:r>
@@ -5516,7 +5142,7 @@
           <a:bodyPr wrap="square" lIns="0" tIns="0" rIns="0" bIns="0" rtlCol="0" anchor="ctr"/>
           <a:lstStyle/>
           <a:p>
-            <a:pPr algn="ctr" indent="0" marL="0">
+            <a:pPr marL="0" indent="0" algn="ctr">
               <a:buNone/>
             </a:pPr>
             <a:r>
@@ -5552,7 +5178,7 @@
           <a:bodyPr wrap="square" lIns="0" tIns="0" rIns="0" bIns="0" rtlCol="0" anchor="ctr"/>
           <a:lstStyle/>
           <a:p>
-            <a:pPr indent="0" marL="0">
+            <a:pPr marL="0" indent="0">
               <a:buNone/>
             </a:pPr>
             <a:r>
@@ -5640,7 +5266,7 @@
           <a:bodyPr wrap="square" lIns="0" tIns="0" rIns="0" bIns="0" rtlCol="0" anchor="ctr"/>
           <a:lstStyle/>
           <a:p>
-            <a:pPr algn="ctr" indent="0" marL="0">
+            <a:pPr marL="0" indent="0" algn="ctr">
               <a:buNone/>
             </a:pPr>
             <a:r>
@@ -5676,7 +5302,7 @@
           <a:bodyPr wrap="square" lIns="0" tIns="0" rIns="0" bIns="0" rtlCol="0" anchor="ctr"/>
           <a:lstStyle/>
           <a:p>
-            <a:pPr indent="0" marL="0">
+            <a:pPr marL="0" indent="0">
               <a:buNone/>
             </a:pPr>
             <a:r>
@@ -5711,7 +5337,7 @@
           </a:prstGeom>
           <a:extLst>
             <a:ext uri="{C572A759-6A51-4108-AA02-DFA0A04FC94B}">
-              <ma14:wrappingTextBoxFlag xmlns:ma14="http://schemas.microsoft.com/office/mac/drawingml/2011/main" val="0"/>
+              <ma14:wrappingTextBoxFlag xmlns:ma14="http://schemas.microsoft.com/office/mac/drawingml/2011/main" xmlns="" val="0"/>
             </a:ext>
           </a:extLst>
         </p:spPr>
@@ -5729,7 +5355,7 @@
           <a:p>
             <a:pPr algn="r"/>
             <a:fld id="{F7021451-1387-4CA6-816F-3879F97B5CBC}" type="slidenum">
-              <a:rPr b="0" lang="en-US"/>
+              <a:rPr lang="en-US" b="0"/>
               <a:t>13</a:t>
             </a:fld>
             <a:endParaRPr lang="en-US"/>
@@ -5764,9 +5390,11 @@
       <p:sp>
         <p:nvSpPr>
           <p:cNvPr id="2" name="Text 0"/>
-          <p:cNvSpPr/>
+          <p:cNvSpPr>
+            <a:spLocks noGrp="1"/>
+          </p:cNvSpPr>
           <p:nvPr>
-            <p:ph idx="100" type="title" hasCustomPrompt="1"/>
+            <p:ph type="title" idx="100" hasCustomPrompt="1"/>
           </p:nvPr>
         </p:nvSpPr>
         <p:spPr>
@@ -5784,7 +5412,7 @@
           <a:bodyPr wrap="square" lIns="0" tIns="0" rIns="0" bIns="0" rtlCol="0" anchor="ctr"/>
           <a:lstStyle/>
           <a:p>
-            <a:pPr algn="l" indent="0" marL="0">
+            <a:pPr marL="0" indent="0" algn="l">
               <a:buNone/>
             </a:pPr>
             <a:r>
@@ -5941,7 +5569,7 @@
           <a:bodyPr wrap="square" lIns="0" tIns="0" rIns="0" bIns="0" rtlCol="0" anchor="ctr"/>
           <a:lstStyle/>
           <a:p>
-            <a:pPr algn="ctr" indent="0" marL="0">
+            <a:pPr marL="0" indent="0" algn="ctr">
               <a:spcAft>
                 <a:spcPts val="1000"/>
               </a:spcAft>
@@ -5958,7 +5586,7 @@
             <a:endParaRPr lang="en-US" sz="2800" dirty="0"/>
           </a:p>
           <a:p>
-            <a:pPr algn="ctr" indent="0" marL="0">
+            <a:pPr marL="0" indent="0" algn="ctr">
               <a:buNone/>
             </a:pPr>
             <a:r>
@@ -5993,7 +5621,7 @@
           </a:prstGeom>
           <a:extLst>
             <a:ext uri="{C572A759-6A51-4108-AA02-DFA0A04FC94B}">
-              <ma14:wrappingTextBoxFlag xmlns:ma14="http://schemas.microsoft.com/office/mac/drawingml/2011/main" val="0"/>
+              <ma14:wrappingTextBoxFlag xmlns:ma14="http://schemas.microsoft.com/office/mac/drawingml/2011/main" xmlns="" val="0"/>
             </a:ext>
           </a:extLst>
         </p:spPr>
@@ -6011,7 +5639,7 @@
           <a:p>
             <a:pPr algn="r"/>
             <a:fld id="{F7021451-1387-4CA6-816F-3879F97B5CBC}" type="slidenum">
-              <a:rPr b="0" lang="en-US"/>
+              <a:rPr lang="en-US" b="0"/>
               <a:t>14</a:t>
             </a:fld>
             <a:endParaRPr lang="en-US"/>
@@ -6046,9 +5674,11 @@
       <p:sp>
         <p:nvSpPr>
           <p:cNvPr id="2" name="Text 0"/>
-          <p:cNvSpPr/>
+          <p:cNvSpPr>
+            <a:spLocks noGrp="1"/>
+          </p:cNvSpPr>
           <p:nvPr>
-            <p:ph idx="100" type="title" hasCustomPrompt="1"/>
+            <p:ph type="title" idx="100" hasCustomPrompt="1"/>
           </p:nvPr>
         </p:nvSpPr>
         <p:spPr>
@@ -6066,7 +5696,7 @@
           <a:bodyPr wrap="square" lIns="0" tIns="0" rIns="0" bIns="0" rtlCol="0" anchor="ctr"/>
           <a:lstStyle/>
           <a:p>
-            <a:pPr algn="l" indent="0" marL="0">
+            <a:pPr marL="0" indent="0" algn="l">
               <a:buNone/>
             </a:pPr>
             <a:r>
@@ -6178,7 +5808,7 @@
           <a:bodyPr wrap="square" lIns="0" tIns="0" rIns="0" bIns="0" rtlCol="0" anchor="ctr"/>
           <a:lstStyle/>
           <a:p>
-            <a:pPr indent="0" marL="0">
+            <a:pPr marL="0" indent="0">
               <a:buNone/>
             </a:pPr>
             <a:r>
@@ -6241,7 +5871,7 @@
           <a:bodyPr wrap="square" lIns="0" tIns="0" rIns="0" bIns="0" rtlCol="0" anchor="ctr"/>
           <a:lstStyle/>
           <a:p>
-            <a:pPr algn="ctr" indent="0" marL="0">
+            <a:pPr marL="0" indent="0" algn="ctr">
               <a:buNone/>
             </a:pPr>
             <a:r>
@@ -6328,7 +5958,7 @@
           <a:bodyPr wrap="square" lIns="0" tIns="0" rIns="0" bIns="0" rtlCol="0" anchor="ctr"/>
           <a:lstStyle/>
           <a:p>
-            <a:pPr algn="ctr" indent="0" marL="0">
+            <a:pPr marL="0" indent="0" algn="ctr">
               <a:buNone/>
             </a:pPr>
             <a:r>
@@ -6363,7 +5993,7 @@
           </a:prstGeom>
           <a:extLst>
             <a:ext uri="{C572A759-6A51-4108-AA02-DFA0A04FC94B}">
-              <ma14:wrappingTextBoxFlag xmlns:ma14="http://schemas.microsoft.com/office/mac/drawingml/2011/main" val="0"/>
+              <ma14:wrappingTextBoxFlag xmlns:ma14="http://schemas.microsoft.com/office/mac/drawingml/2011/main" xmlns="" val="0"/>
             </a:ext>
           </a:extLst>
         </p:spPr>
@@ -6381,7 +6011,7 @@
           <a:p>
             <a:pPr algn="r"/>
             <a:fld id="{F7021451-1387-4CA6-816F-3879F97B5CBC}" type="slidenum">
-              <a:rPr b="0" lang="en-US"/>
+              <a:rPr lang="en-US" b="0"/>
               <a:t>2</a:t>
             </a:fld>
             <a:endParaRPr lang="en-US"/>
@@ -6416,9 +6046,11 @@
       <p:sp>
         <p:nvSpPr>
           <p:cNvPr id="2" name="Text 0"/>
-          <p:cNvSpPr/>
+          <p:cNvSpPr>
+            <a:spLocks noGrp="1"/>
+          </p:cNvSpPr>
           <p:nvPr>
-            <p:ph idx="100" type="title" hasCustomPrompt="1"/>
+            <p:ph type="title" idx="100" hasCustomPrompt="1"/>
           </p:nvPr>
         </p:nvSpPr>
         <p:spPr>
@@ -6436,7 +6068,7 @@
           <a:bodyPr wrap="square" lIns="0" tIns="0" rIns="0" bIns="0" rtlCol="0" anchor="ctr"/>
           <a:lstStyle/>
           <a:p>
-            <a:pPr algn="l" indent="0" marL="0">
+            <a:pPr marL="0" indent="0" algn="l">
               <a:buNone/>
             </a:pPr>
             <a:r>
@@ -6524,7 +6156,7 @@
           <a:bodyPr wrap="square" lIns="0" tIns="0" rIns="0" bIns="0" rtlCol="0" anchor="ctr"/>
           <a:lstStyle/>
           <a:p>
-            <a:pPr algn="ctr" indent="0" marL="0">
+            <a:pPr marL="0" indent="0" algn="ctr">
               <a:buNone/>
             </a:pPr>
             <a:r>
@@ -6560,7 +6192,7 @@
           <a:bodyPr wrap="square" lIns="0" tIns="0" rIns="0" bIns="0" rtlCol="0" anchor="t"/>
           <a:lstStyle/>
           <a:p>
-            <a:pPr indent="0" marL="0">
+            <a:pPr marL="0" indent="0">
               <a:buNone/>
             </a:pPr>
             <a:r>
@@ -6648,7 +6280,7 @@
           <a:bodyPr wrap="square" lIns="0" tIns="0" rIns="0" bIns="0" rtlCol="0" anchor="ctr"/>
           <a:lstStyle/>
           <a:p>
-            <a:pPr algn="ctr" indent="0" marL="0">
+            <a:pPr marL="0" indent="0" algn="ctr">
               <a:buNone/>
             </a:pPr>
             <a:r>
@@ -6684,7 +6316,7 @@
           <a:bodyPr wrap="square" lIns="0" tIns="0" rIns="0" bIns="0" rtlCol="0" anchor="t"/>
           <a:lstStyle/>
           <a:p>
-            <a:pPr indent="0" marL="0">
+            <a:pPr marL="0" indent="0">
               <a:buNone/>
             </a:pPr>
             <a:r>
@@ -6772,7 +6404,7 @@
           <a:bodyPr wrap="square" lIns="0" tIns="0" rIns="0" bIns="0" rtlCol="0" anchor="ctr"/>
           <a:lstStyle/>
           <a:p>
-            <a:pPr algn="ctr" indent="0" marL="0">
+            <a:pPr marL="0" indent="0" algn="ctr">
               <a:buNone/>
             </a:pPr>
             <a:r>
@@ -6808,7 +6440,7 @@
           <a:bodyPr wrap="square" lIns="0" tIns="0" rIns="0" bIns="0" rtlCol="0" anchor="t"/>
           <a:lstStyle/>
           <a:p>
-            <a:pPr indent="0" marL="0">
+            <a:pPr marL="0" indent="0">
               <a:buNone/>
             </a:pPr>
             <a:r>
@@ -6871,7 +6503,7 @@
           <a:bodyPr wrap="square" lIns="0" tIns="0" rIns="0" bIns="0" rtlCol="0" anchor="ctr"/>
           <a:lstStyle/>
           <a:p>
-            <a:pPr indent="0" marL="0">
+            <a:pPr marL="0" indent="0">
               <a:buNone/>
             </a:pPr>
             <a:r>
@@ -6882,16 +6514,13 @@
               </a:rPr>
               <a:t>Scope: </a:t>
             </a:r>
-            <a:pPr indent="0" marL="0">
-              <a:buNone/>
-            </a:pPr>
             <a:r>
               <a:rPr lang="en-US" sz="1800" dirty="0">
                 <a:solidFill>
                   <a:schemeClr val="tx1"/>
                 </a:solidFill>
               </a:rPr>
-              <a:t>offline, account-level classification; no live deployment.</a:t>
+              <a:t>offline, account-level classification, no live deployment.</a:t>
             </a:r>
             <a:endParaRPr lang="en-US" sz="1800" dirty="0"/>
           </a:p>
@@ -6917,7 +6546,7 @@
           </a:prstGeom>
           <a:extLst>
             <a:ext uri="{C572A759-6A51-4108-AA02-DFA0A04FC94B}">
-              <ma14:wrappingTextBoxFlag xmlns:ma14="http://schemas.microsoft.com/office/mac/drawingml/2011/main" val="0"/>
+              <ma14:wrappingTextBoxFlag xmlns:ma14="http://schemas.microsoft.com/office/mac/drawingml/2011/main" xmlns="" val="0"/>
             </a:ext>
           </a:extLst>
         </p:spPr>
@@ -6935,7 +6564,7 @@
           <a:p>
             <a:pPr algn="r"/>
             <a:fld id="{F7021451-1387-4CA6-816F-3879F97B5CBC}" type="slidenum">
-              <a:rPr b="0" lang="en-US"/>
+              <a:rPr lang="en-US" b="0"/>
               <a:t>3</a:t>
             </a:fld>
             <a:endParaRPr lang="en-US"/>
@@ -6970,9 +6599,11 @@
       <p:sp>
         <p:nvSpPr>
           <p:cNvPr id="2" name="Text 0"/>
-          <p:cNvSpPr/>
+          <p:cNvSpPr>
+            <a:spLocks noGrp="1"/>
+          </p:cNvSpPr>
           <p:nvPr>
-            <p:ph idx="100" type="title" hasCustomPrompt="1"/>
+            <p:ph type="title" idx="100" hasCustomPrompt="1"/>
           </p:nvPr>
         </p:nvSpPr>
         <p:spPr>
@@ -6990,7 +6621,7 @@
           <a:bodyPr wrap="square" lIns="0" tIns="0" rIns="0" bIns="0" rtlCol="0" anchor="ctr"/>
           <a:lstStyle/>
           <a:p>
-            <a:pPr algn="l" indent="0" marL="0">
+            <a:pPr marL="0" indent="0" algn="l">
               <a:buNone/>
             </a:pPr>
             <a:r>
@@ -7021,16 +6652,34 @@
         </p:nvGraphicFramePr>
         <p:xfrm>
           <a:off x="548640" y="1188720"/>
-          <a:ext cx="8046720" cy="914400"/>
+          <a:ext cx="8046720" cy="2401824"/>
         </p:xfrm>
         <a:graphic>
           <a:graphicData uri="http://schemas.openxmlformats.org/drawingml/2006/table">
             <a:tbl>
               <a:tblPr/>
               <a:tblGrid>
-                <a:gridCol w="2743200"/>
-                <a:gridCol w="2468880"/>
-                <a:gridCol w="2834640"/>
+                <a:gridCol w="2743200">
+                  <a:extLst>
+                    <a:ext uri="{9D8B030D-6E8A-4147-A177-3AD203B41FA5}">
+                      <a16:colId xmlns:a16="http://schemas.microsoft.com/office/drawing/2014/main" val="20000"/>
+                    </a:ext>
+                  </a:extLst>
+                </a:gridCol>
+                <a:gridCol w="2468880">
+                  <a:extLst>
+                    <a:ext uri="{9D8B030D-6E8A-4147-A177-3AD203B41FA5}">
+                      <a16:colId xmlns:a16="http://schemas.microsoft.com/office/drawing/2014/main" val="20001"/>
+                    </a:ext>
+                  </a:extLst>
+                </a:gridCol>
+                <a:gridCol w="2834640">
+                  <a:extLst>
+                    <a:ext uri="{9D8B030D-6E8A-4147-A177-3AD203B41FA5}">
+                      <a16:colId xmlns:a16="http://schemas.microsoft.com/office/drawing/2014/main" val="20002"/>
+                    </a:ext>
+                  </a:extLst>
+                </a:gridCol>
               </a:tblGrid>
               <a:tr h="384048">
                 <a:tc>
@@ -7038,7 +6687,7 @@
                     <a:bodyPr/>
                     <a:lstStyle/>
                     <a:p>
-                      <a:pPr indent="0" marL="0">
+                      <a:pPr marL="0" indent="0">
                         <a:buNone/>
                       </a:pPr>
                       <a:r>
@@ -7059,7 +6708,7 @@
                       </a:endParaRPr>
                     </a:p>
                   </a:txBody>
-                  <a:tcPr marL="91440" marR="91440" marT="27432" marB="27432" anchor="ctr">
+                  <a:tcPr marT="27432" marB="27432" anchor="ctr">
                     <a:lnL w="9525" cap="flat" cmpd="sng" algn="ctr">
                       <a:solidFill>
                         <a:srgbClr val="DDDDD8"/>
@@ -7106,7 +6755,7 @@
                     <a:bodyPr/>
                     <a:lstStyle/>
                     <a:p>
-                      <a:pPr indent="0" marL="0">
+                      <a:pPr marL="0" indent="0">
                         <a:buNone/>
                       </a:pPr>
                       <a:r>
@@ -7127,7 +6776,7 @@
                       </a:endParaRPr>
                     </a:p>
                   </a:txBody>
-                  <a:tcPr marL="91440" marR="91440" marT="27432" marB="27432" anchor="ctr">
+                  <a:tcPr marT="27432" marB="27432" anchor="ctr">
                     <a:lnL w="9525" cap="flat" cmpd="sng" algn="ctr">
                       <a:solidFill>
                         <a:srgbClr val="DDDDD8"/>
@@ -7174,7 +6823,7 @@
                     <a:bodyPr/>
                     <a:lstStyle/>
                     <a:p>
-                      <a:pPr indent="0" marL="0">
+                      <a:pPr marL="0" indent="0">
                         <a:buNone/>
                       </a:pPr>
                       <a:r>
@@ -7195,7 +6844,7 @@
                       </a:endParaRPr>
                     </a:p>
                   </a:txBody>
-                  <a:tcPr marL="91440" marR="91440" marT="27432" marB="27432" anchor="ctr">
+                  <a:tcPr marT="27432" marB="27432" anchor="ctr">
                     <a:lnL w="9525" cap="flat" cmpd="sng" algn="ctr">
                       <a:solidFill>
                         <a:srgbClr val="DDDDD8"/>
@@ -7237,6 +6886,11 @@
                     </a:solidFill>
                   </a:tcPr>
                 </a:tc>
+                <a:extLst>
+                  <a:ext uri="{0D108BD9-81ED-4DB2-BD59-A6C34878D82A}">
+                    <a16:rowId xmlns:a16="http://schemas.microsoft.com/office/drawing/2014/main" val="10000"/>
+                  </a:ext>
+                </a:extLst>
               </a:tr>
               <a:tr h="384048">
                 <a:tc>
@@ -7244,7 +6898,7 @@
                     <a:bodyPr/>
                     <a:lstStyle/>
                     <a:p>
-                      <a:pPr indent="0" marL="0">
+                      <a:pPr marL="0" indent="0">
                         <a:buNone/>
                       </a:pPr>
                       <a:r>
@@ -7265,7 +6919,7 @@
                       </a:endParaRPr>
                     </a:p>
                   </a:txBody>
-                  <a:tcPr marL="91440" marR="91440" marT="27432" marB="27432" anchor="ctr">
+                  <a:tcPr marT="27432" marB="27432" anchor="ctr">
                     <a:lnL w="9525" cap="flat" cmpd="sng" algn="ctr">
                       <a:solidFill>
                         <a:srgbClr val="DDDDD8"/>
@@ -7312,7 +6966,7 @@
                     <a:bodyPr/>
                     <a:lstStyle/>
                     <a:p>
-                      <a:pPr indent="0" marL="0">
+                      <a:pPr marL="0" indent="0">
                         <a:buNone/>
                       </a:pPr>
                       <a:r>
@@ -7333,7 +6987,7 @@
                       </a:endParaRPr>
                     </a:p>
                   </a:txBody>
-                  <a:tcPr marL="91440" marR="91440" marT="27432" marB="27432" anchor="ctr">
+                  <a:tcPr marT="27432" marB="27432" anchor="ctr">
                     <a:lnL w="9525" cap="flat" cmpd="sng" algn="ctr">
                       <a:solidFill>
                         <a:srgbClr val="DDDDD8"/>
@@ -7380,7 +7034,7 @@
                     <a:bodyPr/>
                     <a:lstStyle/>
                     <a:p>
-                      <a:pPr indent="0" marL="0">
+                      <a:pPr marL="0" indent="0">
                         <a:buNone/>
                       </a:pPr>
                       <a:r>
@@ -7401,7 +7055,7 @@
                       </a:endParaRPr>
                     </a:p>
                   </a:txBody>
-                  <a:tcPr marL="91440" marR="91440" marT="27432" marB="27432" anchor="ctr">
+                  <a:tcPr marT="27432" marB="27432" anchor="ctr">
                     <a:lnL w="9525" cap="flat" cmpd="sng" algn="ctr">
                       <a:solidFill>
                         <a:srgbClr val="DDDDD8"/>
@@ -7443,6 +7097,11 @@
                     </a:solidFill>
                   </a:tcPr>
                 </a:tc>
+                <a:extLst>
+                  <a:ext uri="{0D108BD9-81ED-4DB2-BD59-A6C34878D82A}">
+                    <a16:rowId xmlns:a16="http://schemas.microsoft.com/office/drawing/2014/main" val="10001"/>
+                  </a:ext>
+                </a:extLst>
               </a:tr>
               <a:tr h="384048">
                 <a:tc>
@@ -7450,7 +7109,7 @@
                     <a:bodyPr/>
                     <a:lstStyle/>
                     <a:p>
-                      <a:pPr indent="0" marL="0">
+                      <a:pPr marL="0" indent="0">
                         <a:buNone/>
                       </a:pPr>
                       <a:r>
@@ -7471,7 +7130,7 @@
                       </a:endParaRPr>
                     </a:p>
                   </a:txBody>
-                  <a:tcPr marL="91440" marR="91440" marT="27432" marB="27432" anchor="ctr">
+                  <a:tcPr marT="27432" marB="27432" anchor="ctr">
                     <a:lnL w="9525" cap="flat" cmpd="sng" algn="ctr">
                       <a:solidFill>
                         <a:srgbClr val="DDDDD8"/>
@@ -7518,7 +7177,7 @@
                     <a:bodyPr/>
                     <a:lstStyle/>
                     <a:p>
-                      <a:pPr indent="0" marL="0">
+                      <a:pPr marL="0" indent="0">
                         <a:buNone/>
                       </a:pPr>
                       <a:r>
@@ -7539,7 +7198,7 @@
                       </a:endParaRPr>
                     </a:p>
                   </a:txBody>
-                  <a:tcPr marL="91440" marR="91440" marT="27432" marB="27432" anchor="ctr">
+                  <a:tcPr marT="27432" marB="27432" anchor="ctr">
                     <a:lnL w="9525" cap="flat" cmpd="sng" algn="ctr">
                       <a:solidFill>
                         <a:srgbClr val="DDDDD8"/>
@@ -7586,7 +7245,7 @@
                     <a:bodyPr/>
                     <a:lstStyle/>
                     <a:p>
-                      <a:pPr indent="0" marL="0">
+                      <a:pPr marL="0" indent="0">
                         <a:buNone/>
                       </a:pPr>
                       <a:r>
@@ -7607,7 +7266,7 @@
                       </a:endParaRPr>
                     </a:p>
                   </a:txBody>
-                  <a:tcPr marL="91440" marR="91440" marT="27432" marB="27432" anchor="ctr">
+                  <a:tcPr marT="27432" marB="27432" anchor="ctr">
                     <a:lnL w="9525" cap="flat" cmpd="sng" algn="ctr">
                       <a:solidFill>
                         <a:srgbClr val="DDDDD8"/>
@@ -7649,6 +7308,11 @@
                     </a:solidFill>
                   </a:tcPr>
                 </a:tc>
+                <a:extLst>
+                  <a:ext uri="{0D108BD9-81ED-4DB2-BD59-A6C34878D82A}">
+                    <a16:rowId xmlns:a16="http://schemas.microsoft.com/office/drawing/2014/main" val="10002"/>
+                  </a:ext>
+                </a:extLst>
               </a:tr>
               <a:tr h="384048">
                 <a:tc>
@@ -7656,7 +7320,7 @@
                     <a:bodyPr/>
                     <a:lstStyle/>
                     <a:p>
-                      <a:pPr indent="0" marL="0">
+                      <a:pPr marL="0" indent="0">
                         <a:buNone/>
                       </a:pPr>
                       <a:r>
@@ -7677,7 +7341,7 @@
                       </a:endParaRPr>
                     </a:p>
                   </a:txBody>
-                  <a:tcPr marL="91440" marR="91440" marT="27432" marB="27432" anchor="ctr">
+                  <a:tcPr marT="27432" marB="27432" anchor="ctr">
                     <a:lnL w="9525" cap="flat" cmpd="sng" algn="ctr">
                       <a:solidFill>
                         <a:srgbClr val="DDDDD8"/>
@@ -7724,7 +7388,7 @@
                     <a:bodyPr/>
                     <a:lstStyle/>
                     <a:p>
-                      <a:pPr indent="0" marL="0">
+                      <a:pPr marL="0" indent="0">
                         <a:buNone/>
                       </a:pPr>
                       <a:r>
@@ -7745,7 +7409,7 @@
                       </a:endParaRPr>
                     </a:p>
                   </a:txBody>
-                  <a:tcPr marL="91440" marR="91440" marT="27432" marB="27432" anchor="ctr">
+                  <a:tcPr marT="27432" marB="27432" anchor="ctr">
                     <a:lnL w="9525" cap="flat" cmpd="sng" algn="ctr">
                       <a:solidFill>
                         <a:srgbClr val="DDDDD8"/>
@@ -7792,7 +7456,7 @@
                     <a:bodyPr/>
                     <a:lstStyle/>
                     <a:p>
-                      <a:pPr indent="0" marL="0">
+                      <a:pPr marL="0" indent="0">
                         <a:buNone/>
                       </a:pPr>
                       <a:r>
@@ -7813,7 +7477,7 @@
                       </a:endParaRPr>
                     </a:p>
                   </a:txBody>
-                  <a:tcPr marL="91440" marR="91440" marT="27432" marB="27432" anchor="ctr">
+                  <a:tcPr marT="27432" marB="27432" anchor="ctr">
                     <a:lnL w="9525" cap="flat" cmpd="sng" algn="ctr">
                       <a:solidFill>
                         <a:srgbClr val="DDDDD8"/>
@@ -7855,6 +7519,11 @@
                     </a:solidFill>
                   </a:tcPr>
                 </a:tc>
+                <a:extLst>
+                  <a:ext uri="{0D108BD9-81ED-4DB2-BD59-A6C34878D82A}">
+                    <a16:rowId xmlns:a16="http://schemas.microsoft.com/office/drawing/2014/main" val="10003"/>
+                  </a:ext>
+                </a:extLst>
               </a:tr>
               <a:tr h="384048">
                 <a:tc>
@@ -7862,7 +7531,7 @@
                     <a:bodyPr/>
                     <a:lstStyle/>
                     <a:p>
-                      <a:pPr indent="0" marL="0">
+                      <a:pPr marL="0" indent="0">
                         <a:buNone/>
                       </a:pPr>
                       <a:r>
@@ -7883,7 +7552,7 @@
                       </a:endParaRPr>
                     </a:p>
                   </a:txBody>
-                  <a:tcPr marL="91440" marR="91440" marT="27432" marB="27432" anchor="ctr">
+                  <a:tcPr marT="27432" marB="27432" anchor="ctr">
                     <a:lnL w="9525" cap="flat" cmpd="sng" algn="ctr">
                       <a:solidFill>
                         <a:srgbClr val="DDDDD8"/>
@@ -7930,7 +7599,7 @@
                     <a:bodyPr/>
                     <a:lstStyle/>
                     <a:p>
-                      <a:pPr indent="0" marL="0">
+                      <a:pPr marL="0" indent="0">
                         <a:buNone/>
                       </a:pPr>
                       <a:r>
@@ -7951,7 +7620,7 @@
                       </a:endParaRPr>
                     </a:p>
                   </a:txBody>
-                  <a:tcPr marL="91440" marR="91440" marT="27432" marB="27432" anchor="ctr">
+                  <a:tcPr marT="27432" marB="27432" anchor="ctr">
                     <a:lnL w="9525" cap="flat" cmpd="sng" algn="ctr">
                       <a:solidFill>
                         <a:srgbClr val="DDDDD8"/>
@@ -7998,7 +7667,7 @@
                     <a:bodyPr/>
                     <a:lstStyle/>
                     <a:p>
-                      <a:pPr indent="0" marL="0">
+                      <a:pPr marL="0" indent="0">
                         <a:buNone/>
                       </a:pPr>
                       <a:r>
@@ -8019,7 +7688,7 @@
                       </a:endParaRPr>
                     </a:p>
                   </a:txBody>
-                  <a:tcPr marL="91440" marR="91440" marT="27432" marB="27432" anchor="ctr">
+                  <a:tcPr marT="27432" marB="27432" anchor="ctr">
                     <a:lnL w="9525" cap="flat" cmpd="sng" algn="ctr">
                       <a:solidFill>
                         <a:srgbClr val="DDDDD8"/>
@@ -8061,6 +7730,11 @@
                     </a:solidFill>
                   </a:tcPr>
                 </a:tc>
+                <a:extLst>
+                  <a:ext uri="{0D108BD9-81ED-4DB2-BD59-A6C34878D82A}">
+                    <a16:rowId xmlns:a16="http://schemas.microsoft.com/office/drawing/2014/main" val="10004"/>
+                  </a:ext>
+                </a:extLst>
               </a:tr>
               <a:tr h="384048">
                 <a:tc>
@@ -8068,7 +7742,7 @@
                     <a:bodyPr/>
                     <a:lstStyle/>
                     <a:p>
-                      <a:pPr indent="0" marL="0">
+                      <a:pPr marL="0" indent="0">
                         <a:buNone/>
                       </a:pPr>
                       <a:r>
@@ -8089,7 +7763,7 @@
                       </a:endParaRPr>
                     </a:p>
                   </a:txBody>
-                  <a:tcPr marL="91440" marR="91440" marT="27432" marB="27432" anchor="ctr">
+                  <a:tcPr marT="27432" marB="27432" anchor="ctr">
                     <a:lnL w="9525" cap="flat" cmpd="sng" algn="ctr">
                       <a:solidFill>
                         <a:srgbClr val="DDDDD8"/>
@@ -8136,7 +7810,7 @@
                     <a:bodyPr/>
                     <a:lstStyle/>
                     <a:p>
-                      <a:pPr indent="0" marL="0">
+                      <a:pPr marL="0" indent="0">
                         <a:buNone/>
                       </a:pPr>
                       <a:r>
@@ -8157,7 +7831,7 @@
                       </a:endParaRPr>
                     </a:p>
                   </a:txBody>
-                  <a:tcPr marL="91440" marR="91440" marT="27432" marB="27432" anchor="ctr">
+                  <a:tcPr marT="27432" marB="27432" anchor="ctr">
                     <a:lnL w="9525" cap="flat" cmpd="sng" algn="ctr">
                       <a:solidFill>
                         <a:srgbClr val="DDDDD8"/>
@@ -8204,7 +7878,7 @@
                     <a:bodyPr/>
                     <a:lstStyle/>
                     <a:p>
-                      <a:pPr indent="0" marL="0">
+                      <a:pPr marL="0" indent="0">
                         <a:buNone/>
                       </a:pPr>
                       <a:r>
@@ -8225,7 +7899,7 @@
                       </a:endParaRPr>
                     </a:p>
                   </a:txBody>
-                  <a:tcPr marL="91440" marR="91440" marT="27432" marB="27432" anchor="ctr">
+                  <a:tcPr marT="27432" marB="27432" anchor="ctr">
                     <a:lnL w="9525" cap="flat" cmpd="sng" algn="ctr">
                       <a:solidFill>
                         <a:srgbClr val="DDDDD8"/>
@@ -8267,6 +7941,11 @@
                     </a:solidFill>
                   </a:tcPr>
                 </a:tc>
+                <a:extLst>
+                  <a:ext uri="{0D108BD9-81ED-4DB2-BD59-A6C34878D82A}">
+                    <a16:rowId xmlns:a16="http://schemas.microsoft.com/office/drawing/2014/main" val="10005"/>
+                  </a:ext>
+                </a:extLst>
               </a:tr>
             </a:tbl>
           </a:graphicData>
@@ -8274,7 +7953,7 @@
       </p:graphicFrame>
       <p:sp>
         <p:nvSpPr>
-          <p:cNvPr id="5" name="gap box"/>
+          <p:cNvPr id="3" name="gap box"/>
           <p:cNvSpPr/>
           <p:nvPr/>
         </p:nvSpPr>
@@ -8320,7 +7999,7 @@
           <a:bodyPr wrap="square" lIns="0" tIns="0" rIns="0" bIns="0" rtlCol="0" anchor="ctr"/>
           <a:lstStyle/>
           <a:p>
-            <a:pPr indent="0" marL="0">
+            <a:pPr marL="0" indent="0">
               <a:buNone/>
             </a:pPr>
             <a:r>
@@ -8331,9 +8010,6 @@
               </a:rPr>
               <a:t>Gap: </a:t>
             </a:r>
-            <a:pPr indent="0" marL="0">
-              <a:buNone/>
-            </a:pPr>
             <a:r>
               <a:rPr lang="en-US" sz="1600" dirty="0">
                 <a:solidFill>
@@ -8366,7 +8042,7 @@
           </a:prstGeom>
           <a:extLst>
             <a:ext uri="{C572A759-6A51-4108-AA02-DFA0A04FC94B}">
-              <ma14:wrappingTextBoxFlag xmlns:ma14="http://schemas.microsoft.com/office/mac/drawingml/2011/main" val="0"/>
+              <ma14:wrappingTextBoxFlag xmlns:ma14="http://schemas.microsoft.com/office/mac/drawingml/2011/main" xmlns="" val="0"/>
             </a:ext>
           </a:extLst>
         </p:spPr>
@@ -8384,7 +8060,7 @@
           <a:p>
             <a:pPr algn="r"/>
             <a:fld id="{F7021451-1387-4CA6-816F-3879F97B5CBC}" type="slidenum">
-              <a:rPr b="0" lang="en-US"/>
+              <a:rPr lang="en-US" b="0"/>
               <a:t>4</a:t>
             </a:fld>
             <a:endParaRPr lang="en-US"/>
@@ -8419,9 +8095,11 @@
       <p:sp>
         <p:nvSpPr>
           <p:cNvPr id="2" name="Text 0"/>
-          <p:cNvSpPr/>
+          <p:cNvSpPr>
+            <a:spLocks noGrp="1"/>
+          </p:cNvSpPr>
           <p:nvPr>
-            <p:ph idx="100" type="title" hasCustomPrompt="1"/>
+            <p:ph type="title" idx="100" hasCustomPrompt="1"/>
           </p:nvPr>
         </p:nvSpPr>
         <p:spPr>
@@ -8439,7 +8117,7 @@
           <a:bodyPr wrap="square" lIns="0" tIns="0" rIns="0" bIns="0" rtlCol="0" anchor="ctr"/>
           <a:lstStyle/>
           <a:p>
-            <a:pPr algn="l" indent="0" marL="0">
+            <a:pPr marL="0" indent="0" algn="l">
               <a:buNone/>
             </a:pPr>
             <a:r>
@@ -8548,45 +8226,9 @@
           </a:p>
         </p:txBody>
       </p:sp>
-      <p:sp>
-        <p:nvSpPr>
-          <p:cNvPr id="5" name="dataset note"/>
-          <p:cNvSpPr txBox="1"/>
-          <p:nvPr/>
-        </p:nvSpPr>
-        <p:spPr>
-          <a:xfrm>
-            <a:off x="548640" y="4069080"/>
-            <a:ext cx="4114800" cy="457200"/>
-          </a:xfrm>
-          <a:prstGeom prst="rect">
-            <a:avLst/>
-          </a:prstGeom>
-          <a:noFill/>
-          <a:ln/>
-        </p:spPr>
-        <p:txBody>
-          <a:bodyPr wrap="square" lIns="0" tIns="0" rIns="0" bIns="0" rtlCol="0" anchor="ctr"/>
-          <a:lstStyle/>
-          <a:p>
-            <a:pPr indent="0" marL="0">
-              <a:buNone/>
-            </a:pPr>
-            <a:r>
-              <a:rPr lang="en-US" sz="1400" i="1" dirty="0">
-                <a:solidFill>
-                  <a:schemeClr val="tx1"/>
-                </a:solidFill>
-              </a:rPr>
-              <a:t>Note: dataset source and licence: [Insert]</a:t>
-            </a:r>
-            <a:endParaRPr lang="en-US" sz="1400" dirty="0"/>
-          </a:p>
-        </p:txBody>
-      </p:sp>
       <p:graphicFrame>
         <p:nvGraphicFramePr>
-          <p:cNvPr id="6" name="Chart 0" descr=""/>
+          <p:cNvPr id="6" name="Chart 0"/>
           <p:cNvGraphicFramePr/>
           <p:nvPr/>
         </p:nvGraphicFramePr>
@@ -8594,9 +8236,9 @@
           <a:off x="4937760" y="1188720"/>
           <a:ext cx="3657600" cy="3108960"/>
         </p:xfrm>
-        <a:graphic xmlns:a="http://schemas.openxmlformats.org/drawingml/2006/main">
+        <a:graphic>
           <a:graphicData uri="http://schemas.openxmlformats.org/drawingml/2006/chart">
-            <c:chart xmlns:c="http://schemas.openxmlformats.org/drawingml/2006/chart" r:id="rId1"/>
+            <c:chart xmlns:c="http://schemas.openxmlformats.org/drawingml/2006/chart" xmlns:r="http://schemas.openxmlformats.org/officeDocument/2006/relationships" r:id="rId3"/>
           </a:graphicData>
         </a:graphic>
       </p:graphicFrame>
@@ -8621,7 +8263,7 @@
           <a:bodyPr wrap="square" lIns="0" tIns="0" rIns="0" bIns="0" rtlCol="0" anchor="ctr"/>
           <a:lstStyle/>
           <a:p>
-            <a:pPr algn="ctr" indent="0" marL="0">
+            <a:pPr marL="0" indent="0" algn="ctr">
               <a:buNone/>
             </a:pPr>
             <a:r>
@@ -8656,7 +8298,7 @@
           </a:prstGeom>
           <a:extLst>
             <a:ext uri="{C572A759-6A51-4108-AA02-DFA0A04FC94B}">
-              <ma14:wrappingTextBoxFlag xmlns:ma14="http://schemas.microsoft.com/office/mac/drawingml/2011/main" val="0"/>
+              <ma14:wrappingTextBoxFlag xmlns:ma14="http://schemas.microsoft.com/office/mac/drawingml/2011/main" xmlns="" val="0"/>
             </a:ext>
           </a:extLst>
         </p:spPr>
@@ -8674,7 +8316,7 @@
           <a:p>
             <a:pPr algn="r"/>
             <a:fld id="{F7021451-1387-4CA6-816F-3879F97B5CBC}" type="slidenum">
-              <a:rPr b="0" lang="en-US"/>
+              <a:rPr lang="en-US" b="0"/>
               <a:t>5</a:t>
             </a:fld>
             <a:endParaRPr lang="en-US"/>
@@ -8709,9 +8351,11 @@
       <p:sp>
         <p:nvSpPr>
           <p:cNvPr id="2" name="Text 0"/>
-          <p:cNvSpPr/>
+          <p:cNvSpPr>
+            <a:spLocks noGrp="1"/>
+          </p:cNvSpPr>
           <p:nvPr>
-            <p:ph idx="100" type="title" hasCustomPrompt="1"/>
+            <p:ph type="title" idx="100" hasCustomPrompt="1"/>
           </p:nvPr>
         </p:nvSpPr>
         <p:spPr>
@@ -8729,7 +8373,7 @@
           <a:bodyPr wrap="square" lIns="0" tIns="0" rIns="0" bIns="0" rtlCol="0" anchor="ctr"/>
           <a:lstStyle/>
           <a:p>
-            <a:pPr algn="l" indent="0" marL="0">
+            <a:pPr marL="0" indent="0" algn="l">
               <a:buNone/>
             </a:pPr>
             <a:r>
@@ -8792,7 +8436,7 @@
           <a:bodyPr wrap="square" lIns="0" tIns="0" rIns="0" bIns="0" rtlCol="0" anchor="ctr"/>
           <a:lstStyle/>
           <a:p>
-            <a:pPr algn="ctr" indent="0" marL="0">
+            <a:pPr marL="0" indent="0" algn="ctr">
               <a:buNone/>
             </a:pPr>
             <a:r>
@@ -8855,7 +8499,7 @@
           <a:bodyPr wrap="square" lIns="0" tIns="0" rIns="0" bIns="0" rtlCol="0" anchor="ctr"/>
           <a:lstStyle/>
           <a:p>
-            <a:pPr algn="ctr" indent="0" marL="0">
+            <a:pPr marL="0" indent="0" algn="ctr">
               <a:buNone/>
             </a:pPr>
             <a:r>
@@ -8942,7 +8586,7 @@
           <a:bodyPr wrap="square" lIns="0" tIns="0" rIns="0" bIns="0" rtlCol="0" anchor="ctr"/>
           <a:lstStyle/>
           <a:p>
-            <a:pPr algn="ctr" indent="0" marL="0">
+            <a:pPr marL="0" indent="0" algn="ctr">
               <a:buNone/>
             </a:pPr>
             <a:r>
@@ -9005,7 +8649,7 @@
           <a:bodyPr wrap="square" lIns="0" tIns="0" rIns="0" bIns="0" rtlCol="0" anchor="ctr"/>
           <a:lstStyle/>
           <a:p>
-            <a:pPr algn="ctr" indent="0" marL="0">
+            <a:pPr marL="0" indent="0" algn="ctr">
               <a:buNone/>
             </a:pPr>
             <a:r>
@@ -9092,7 +8736,7 @@
           <a:bodyPr wrap="square" lIns="0" tIns="0" rIns="0" bIns="0" rtlCol="0" anchor="ctr"/>
           <a:lstStyle/>
           <a:p>
-            <a:pPr algn="ctr" indent="0" marL="0">
+            <a:pPr marL="0" indent="0" algn="ctr">
               <a:buNone/>
             </a:pPr>
             <a:r>
@@ -9155,7 +8799,7 @@
           <a:bodyPr wrap="square" lIns="0" tIns="0" rIns="0" bIns="0" rtlCol="0" anchor="ctr"/>
           <a:lstStyle/>
           <a:p>
-            <a:pPr algn="ctr" indent="0" marL="0">
+            <a:pPr marL="0" indent="0" algn="ctr">
               <a:buNone/>
             </a:pPr>
             <a:r>
@@ -9242,7 +8886,7 @@
           <a:bodyPr wrap="square" lIns="0" tIns="0" rIns="0" bIns="0" rtlCol="0" anchor="ctr"/>
           <a:lstStyle/>
           <a:p>
-            <a:pPr algn="ctr" indent="0" marL="0">
+            <a:pPr marL="0" indent="0" algn="ctr">
               <a:buNone/>
             </a:pPr>
             <a:r>
@@ -9305,7 +8949,7 @@
           <a:bodyPr wrap="square" lIns="0" tIns="0" rIns="0" bIns="0" rtlCol="0" anchor="ctr"/>
           <a:lstStyle/>
           <a:p>
-            <a:pPr algn="ctr" indent="0" marL="0">
+            <a:pPr marL="0" indent="0" algn="ctr">
               <a:buNone/>
             </a:pPr>
             <a:r>
@@ -9392,7 +9036,7 @@
           <a:bodyPr wrap="square" lIns="0" tIns="0" rIns="0" bIns="0" rtlCol="0" anchor="ctr"/>
           <a:lstStyle/>
           <a:p>
-            <a:pPr algn="ctr" indent="0" marL="0">
+            <a:pPr marL="0" indent="0" algn="ctr">
               <a:buNone/>
             </a:pPr>
             <a:r>
@@ -9455,7 +9099,7 @@
           <a:bodyPr wrap="square" lIns="0" tIns="0" rIns="0" bIns="0" rtlCol="0" anchor="ctr"/>
           <a:lstStyle/>
           <a:p>
-            <a:pPr algn="ctr" indent="0" marL="0">
+            <a:pPr marL="0" indent="0" algn="ctr">
               <a:buNone/>
             </a:pPr>
             <a:r>
@@ -9472,7 +9116,7 @@
       </p:sp>
       <p:sp>
         <p:nvSpPr>
-          <p:cNvPr id="25" name="Slide Number Placeholder 0"/>
+          <p:cNvPr id="3" name="Slide Number Placeholder 0"/>
           <p:cNvSpPr>
             <a:spLocks noGrp="1"/>
           </p:cNvSpPr>
@@ -9490,7 +9134,7 @@
           </a:prstGeom>
           <a:extLst>
             <a:ext uri="{C572A759-6A51-4108-AA02-DFA0A04FC94B}">
-              <ma14:wrappingTextBoxFlag xmlns:ma14="http://schemas.microsoft.com/office/mac/drawingml/2011/main" val="0"/>
+              <ma14:wrappingTextBoxFlag xmlns:ma14="http://schemas.microsoft.com/office/mac/drawingml/2011/main" xmlns="" val="0"/>
             </a:ext>
           </a:extLst>
         </p:spPr>
@@ -9508,7 +9152,7 @@
           <a:p>
             <a:pPr algn="r"/>
             <a:fld id="{F7021451-1387-4CA6-816F-3879F97B5CBC}" type="slidenum">
-              <a:rPr b="0" lang="en-US"/>
+              <a:rPr lang="en-US" b="0"/>
               <a:t>6</a:t>
             </a:fld>
             <a:endParaRPr lang="en-US"/>
@@ -9543,9 +9187,11 @@
       <p:sp>
         <p:nvSpPr>
           <p:cNvPr id="2" name="Text 0"/>
-          <p:cNvSpPr/>
+          <p:cNvSpPr>
+            <a:spLocks noGrp="1"/>
+          </p:cNvSpPr>
           <p:nvPr>
-            <p:ph idx="100" type="title" hasCustomPrompt="1"/>
+            <p:ph type="title" idx="100" hasCustomPrompt="1"/>
           </p:nvPr>
         </p:nvSpPr>
         <p:spPr>
@@ -9563,7 +9209,7 @@
           <a:bodyPr wrap="square" lIns="0" tIns="0" rIns="0" bIns="0" rtlCol="0" anchor="ctr"/>
           <a:lstStyle/>
           <a:p>
-            <a:pPr algn="l" indent="0" marL="0">
+            <a:pPr marL="0" indent="0" algn="l">
               <a:buNone/>
             </a:pPr>
             <a:r>
@@ -9738,7 +9384,7 @@
           <a:bodyPr wrap="square" lIns="0" tIns="0" rIns="0" bIns="0" rtlCol="0" anchor="ctr"/>
           <a:lstStyle/>
           <a:p>
-            <a:pPr algn="ctr" indent="0" marL="0">
+            <a:pPr marL="0" indent="0" algn="ctr">
               <a:buNone/>
             </a:pPr>
             <a:r>
@@ -9774,7 +9420,7 @@
           <a:bodyPr wrap="square" lIns="0" tIns="0" rIns="0" bIns="0" rtlCol="0" anchor="ctr"/>
           <a:lstStyle/>
           <a:p>
-            <a:pPr algn="ctr" indent="0" marL="0">
+            <a:pPr marL="0" indent="0" algn="ctr">
               <a:buNone/>
             </a:pPr>
             <a:r>
@@ -9813,7 +9459,7 @@
           <a:bodyPr wrap="square" lIns="0" tIns="0" rIns="0" bIns="0" rtlCol="0" anchor="ctr"/>
           <a:lstStyle/>
           <a:p>
-            <a:pPr algn="ctr" indent="0" marL="0">
+            <a:pPr marL="0" indent="0" algn="ctr">
               <a:buNone/>
             </a:pPr>
             <a:r>
@@ -9848,7 +9494,7 @@
           </a:prstGeom>
           <a:extLst>
             <a:ext uri="{C572A759-6A51-4108-AA02-DFA0A04FC94B}">
-              <ma14:wrappingTextBoxFlag xmlns:ma14="http://schemas.microsoft.com/office/mac/drawingml/2011/main" val="0"/>
+              <ma14:wrappingTextBoxFlag xmlns:ma14="http://schemas.microsoft.com/office/mac/drawingml/2011/main" xmlns="" val="0"/>
             </a:ext>
           </a:extLst>
         </p:spPr>
@@ -9866,7 +9512,7 @@
           <a:p>
             <a:pPr algn="r"/>
             <a:fld id="{F7021451-1387-4CA6-816F-3879F97B5CBC}" type="slidenum">
-              <a:rPr b="0" lang="en-US"/>
+              <a:rPr lang="en-US" b="0"/>
               <a:t>7</a:t>
             </a:fld>
             <a:endParaRPr lang="en-US"/>
@@ -9901,9 +9547,11 @@
       <p:sp>
         <p:nvSpPr>
           <p:cNvPr id="2" name="Text 0"/>
-          <p:cNvSpPr/>
+          <p:cNvSpPr>
+            <a:spLocks noGrp="1"/>
+          </p:cNvSpPr>
           <p:nvPr>
-            <p:ph idx="100" type="title" hasCustomPrompt="1"/>
+            <p:ph type="title" idx="100" hasCustomPrompt="1"/>
           </p:nvPr>
         </p:nvSpPr>
         <p:spPr>
@@ -9921,7 +9569,7 @@
           <a:bodyPr wrap="square" lIns="0" tIns="0" rIns="0" bIns="0" rtlCol="0" anchor="ctr"/>
           <a:lstStyle/>
           <a:p>
-            <a:pPr algn="l" indent="0" marL="0">
+            <a:pPr marL="0" indent="0" algn="l">
               <a:buNone/>
             </a:pPr>
             <a:r>
@@ -10050,7 +9698,7 @@
       </p:sp>
       <p:graphicFrame>
         <p:nvGraphicFramePr>
-          <p:cNvPr id="5" name="Chart 0" descr=""/>
+          <p:cNvPr id="5" name="Chart 0"/>
           <p:cNvGraphicFramePr/>
           <p:nvPr/>
         </p:nvGraphicFramePr>
@@ -10058,9 +9706,9 @@
           <a:off x="4846320" y="1097280"/>
           <a:ext cx="3794760" cy="3017520"/>
         </p:xfrm>
-        <a:graphic xmlns:a="http://schemas.openxmlformats.org/drawingml/2006/main">
+        <a:graphic>
           <a:graphicData uri="http://schemas.openxmlformats.org/drawingml/2006/chart">
-            <c:chart xmlns:c="http://schemas.openxmlformats.org/drawingml/2006/chart" r:id="rId1"/>
+            <c:chart xmlns:c="http://schemas.openxmlformats.org/drawingml/2006/chart" xmlns:r="http://schemas.openxmlformats.org/officeDocument/2006/relationships" r:id="rId3"/>
           </a:graphicData>
         </a:graphic>
       </p:graphicFrame>
@@ -10085,7 +9733,7 @@
           <a:bodyPr wrap="square" lIns="0" tIns="0" rIns="0" bIns="0" rtlCol="0" anchor="t"/>
           <a:lstStyle/>
           <a:p>
-            <a:pPr indent="0" marL="0">
+            <a:pPr marL="0" indent="0">
               <a:buNone/>
             </a:pPr>
             <a:r>
@@ -10120,7 +9768,7 @@
           </a:prstGeom>
           <a:extLst>
             <a:ext uri="{C572A759-6A51-4108-AA02-DFA0A04FC94B}">
-              <ma14:wrappingTextBoxFlag xmlns:ma14="http://schemas.microsoft.com/office/mac/drawingml/2011/main" val="0"/>
+              <ma14:wrappingTextBoxFlag xmlns:ma14="http://schemas.microsoft.com/office/mac/drawingml/2011/main" xmlns="" val="0"/>
             </a:ext>
           </a:extLst>
         </p:spPr>
@@ -10138,7 +9786,7 @@
           <a:p>
             <a:pPr algn="r"/>
             <a:fld id="{F7021451-1387-4CA6-816F-3879F97B5CBC}" type="slidenum">
-              <a:rPr b="0" lang="en-US"/>
+              <a:rPr lang="en-US" b="0"/>
               <a:t>8</a:t>
             </a:fld>
             <a:endParaRPr lang="en-US"/>
@@ -10173,9 +9821,11 @@
       <p:sp>
         <p:nvSpPr>
           <p:cNvPr id="2" name="Text 0"/>
-          <p:cNvSpPr/>
+          <p:cNvSpPr>
+            <a:spLocks noGrp="1"/>
+          </p:cNvSpPr>
           <p:nvPr>
-            <p:ph idx="100" type="title" hasCustomPrompt="1"/>
+            <p:ph type="title" idx="100" hasCustomPrompt="1"/>
           </p:nvPr>
         </p:nvSpPr>
         <p:spPr>
@@ -10193,7 +9843,7 @@
           <a:bodyPr wrap="square" lIns="0" tIns="0" rIns="0" bIns="0" rtlCol="0" anchor="ctr"/>
           <a:lstStyle/>
           <a:p>
-            <a:pPr algn="l" indent="0" marL="0">
+            <a:pPr marL="0" indent="0" algn="l">
               <a:buNone/>
             </a:pPr>
             <a:r>
@@ -10224,15 +9874,27 @@
         </p:nvGraphicFramePr>
         <p:xfrm>
           <a:off x="548640" y="1188720"/>
-          <a:ext cx="3566160" cy="914400"/>
+          <a:ext cx="3566160" cy="2688336"/>
         </p:xfrm>
         <a:graphic>
           <a:graphicData uri="http://schemas.openxmlformats.org/drawingml/2006/table">
             <a:tbl>
               <a:tblPr/>
               <a:tblGrid>
-                <a:gridCol w="1920240"/>
-                <a:gridCol w="1645920"/>
+                <a:gridCol w="1920240">
+                  <a:extLst>
+                    <a:ext uri="{9D8B030D-6E8A-4147-A177-3AD203B41FA5}">
+                      <a16:colId xmlns:a16="http://schemas.microsoft.com/office/drawing/2014/main" val="20000"/>
+                    </a:ext>
+                  </a:extLst>
+                </a:gridCol>
+                <a:gridCol w="1645920">
+                  <a:extLst>
+                    <a:ext uri="{9D8B030D-6E8A-4147-A177-3AD203B41FA5}">
+                      <a16:colId xmlns:a16="http://schemas.microsoft.com/office/drawing/2014/main" val="20001"/>
+                    </a:ext>
+                  </a:extLst>
+                </a:gridCol>
               </a:tblGrid>
               <a:tr h="384048">
                 <a:tc>
@@ -10240,7 +9902,7 @@
                     <a:bodyPr/>
                     <a:lstStyle/>
                     <a:p>
-                      <a:pPr algn="l" indent="0" marL="0">
+                      <a:pPr marL="0" indent="0" algn="l">
                         <a:buNone/>
                       </a:pPr>
                       <a:r>
@@ -10308,7 +9970,7 @@
                     <a:bodyPr/>
                     <a:lstStyle/>
                     <a:p>
-                      <a:pPr algn="r" indent="0" marL="0">
+                      <a:pPr marL="0" indent="0" algn="r">
                         <a:buNone/>
                       </a:pPr>
                       <a:r>
@@ -10371,6 +10033,11 @@
                     </a:solidFill>
                   </a:tcPr>
                 </a:tc>
+                <a:extLst>
+                  <a:ext uri="{0D108BD9-81ED-4DB2-BD59-A6C34878D82A}">
+                    <a16:rowId xmlns:a16="http://schemas.microsoft.com/office/drawing/2014/main" val="10000"/>
+                  </a:ext>
+                </a:extLst>
               </a:tr>
               <a:tr h="384048">
                 <a:tc>
@@ -10378,7 +10045,7 @@
                     <a:bodyPr/>
                     <a:lstStyle/>
                     <a:p>
-                      <a:pPr indent="0" marL="0">
+                      <a:pPr marL="0" indent="0">
                         <a:buNone/>
                       </a:pPr>
                       <a:r>
@@ -10446,7 +10113,7 @@
                     <a:bodyPr/>
                     <a:lstStyle/>
                     <a:p>
-                      <a:pPr algn="r" indent="0" marL="0">
+                      <a:pPr marL="0" indent="0" algn="r">
                         <a:buNone/>
                       </a:pPr>
                       <a:r>
@@ -10509,6 +10176,11 @@
                     </a:solidFill>
                   </a:tcPr>
                 </a:tc>
+                <a:extLst>
+                  <a:ext uri="{0D108BD9-81ED-4DB2-BD59-A6C34878D82A}">
+                    <a16:rowId xmlns:a16="http://schemas.microsoft.com/office/drawing/2014/main" val="10001"/>
+                  </a:ext>
+                </a:extLst>
               </a:tr>
               <a:tr h="384048">
                 <a:tc>
@@ -10516,7 +10188,7 @@
                     <a:bodyPr/>
                     <a:lstStyle/>
                     <a:p>
-                      <a:pPr indent="0" marL="0">
+                      <a:pPr marL="0" indent="0">
                         <a:buNone/>
                       </a:pPr>
                       <a:r>
@@ -10584,7 +10256,7 @@
                     <a:bodyPr/>
                     <a:lstStyle/>
                     <a:p>
-                      <a:pPr algn="r" indent="0" marL="0">
+                      <a:pPr marL="0" indent="0" algn="r">
                         <a:buNone/>
                       </a:pPr>
                       <a:r>
@@ -10647,6 +10319,11 @@
                     </a:solidFill>
                   </a:tcPr>
                 </a:tc>
+                <a:extLst>
+                  <a:ext uri="{0D108BD9-81ED-4DB2-BD59-A6C34878D82A}">
+                    <a16:rowId xmlns:a16="http://schemas.microsoft.com/office/drawing/2014/main" val="10002"/>
+                  </a:ext>
+                </a:extLst>
               </a:tr>
               <a:tr h="384048">
                 <a:tc>
@@ -10654,7 +10331,7 @@
                     <a:bodyPr/>
                     <a:lstStyle/>
                     <a:p>
-                      <a:pPr indent="0" marL="0">
+                      <a:pPr marL="0" indent="0">
                         <a:buNone/>
                       </a:pPr>
                       <a:r>
@@ -10722,7 +10399,7 @@
                     <a:bodyPr/>
                     <a:lstStyle/>
                     <a:p>
-                      <a:pPr algn="r" indent="0" marL="0">
+                      <a:pPr marL="0" indent="0" algn="r">
                         <a:buNone/>
                       </a:pPr>
                       <a:r>
@@ -10785,6 +10462,11 @@
                     </a:solidFill>
                   </a:tcPr>
                 </a:tc>
+                <a:extLst>
+                  <a:ext uri="{0D108BD9-81ED-4DB2-BD59-A6C34878D82A}">
+                    <a16:rowId xmlns:a16="http://schemas.microsoft.com/office/drawing/2014/main" val="10003"/>
+                  </a:ext>
+                </a:extLst>
               </a:tr>
               <a:tr h="384048">
                 <a:tc>
@@ -10792,7 +10474,7 @@
                     <a:bodyPr/>
                     <a:lstStyle/>
                     <a:p>
-                      <a:pPr indent="0" marL="0">
+                      <a:pPr marL="0" indent="0">
                         <a:buNone/>
                       </a:pPr>
                       <a:r>
@@ -10860,7 +10542,7 @@
                     <a:bodyPr/>
                     <a:lstStyle/>
                     <a:p>
-                      <a:pPr algn="r" indent="0" marL="0">
+                      <a:pPr marL="0" indent="0" algn="r">
                         <a:buNone/>
                       </a:pPr>
                       <a:r>
@@ -10923,6 +10605,11 @@
                     </a:solidFill>
                   </a:tcPr>
                 </a:tc>
+                <a:extLst>
+                  <a:ext uri="{0D108BD9-81ED-4DB2-BD59-A6C34878D82A}">
+                    <a16:rowId xmlns:a16="http://schemas.microsoft.com/office/drawing/2014/main" val="10004"/>
+                  </a:ext>
+                </a:extLst>
               </a:tr>
               <a:tr h="384048">
                 <a:tc>
@@ -10930,7 +10617,7 @@
                     <a:bodyPr/>
                     <a:lstStyle/>
                     <a:p>
-                      <a:pPr indent="0" marL="0">
+                      <a:pPr marL="0" indent="0">
                         <a:buNone/>
                       </a:pPr>
                       <a:r>
@@ -10998,7 +10685,7 @@
                     <a:bodyPr/>
                     <a:lstStyle/>
                     <a:p>
-                      <a:pPr algn="r" indent="0" marL="0">
+                      <a:pPr marL="0" indent="0" algn="r">
                         <a:buNone/>
                       </a:pPr>
                       <a:r>
@@ -11061,6 +10748,11 @@
                     </a:solidFill>
                   </a:tcPr>
                 </a:tc>
+                <a:extLst>
+                  <a:ext uri="{0D108BD9-81ED-4DB2-BD59-A6C34878D82A}">
+                    <a16:rowId xmlns:a16="http://schemas.microsoft.com/office/drawing/2014/main" val="10005"/>
+                  </a:ext>
+                </a:extLst>
               </a:tr>
               <a:tr h="384048">
                 <a:tc>
@@ -11068,7 +10760,7 @@
                     <a:bodyPr/>
                     <a:lstStyle/>
                     <a:p>
-                      <a:pPr indent="0" marL="0">
+                      <a:pPr marL="0" indent="0">
                         <a:buNone/>
                       </a:pPr>
                       <a:r>
@@ -11136,7 +10828,7 @@
                     <a:bodyPr/>
                     <a:lstStyle/>
                     <a:p>
-                      <a:pPr algn="r" indent="0" marL="0">
+                      <a:pPr marL="0" indent="0" algn="r">
                         <a:buNone/>
                       </a:pPr>
                       <a:r>
@@ -11199,6 +10891,11 @@
                     </a:solidFill>
                   </a:tcPr>
                 </a:tc>
+                <a:extLst>
+                  <a:ext uri="{0D108BD9-81ED-4DB2-BD59-A6C34878D82A}">
+                    <a16:rowId xmlns:a16="http://schemas.microsoft.com/office/drawing/2014/main" val="10006"/>
+                  </a:ext>
+                </a:extLst>
               </a:tr>
             </a:tbl>
           </a:graphicData>
@@ -11225,7 +10922,7 @@
           <a:bodyPr wrap="square" lIns="0" tIns="0" rIns="0" bIns="0" rtlCol="0" anchor="ctr"/>
           <a:lstStyle/>
           <a:p>
-            <a:pPr algn="ctr" indent="0" marL="0">
+            <a:pPr marL="0" indent="0" algn="ctr">
               <a:buNone/>
             </a:pPr>
             <a:r>
@@ -11261,7 +10958,7 @@
           <a:bodyPr wrap="square" lIns="0" tIns="0" rIns="0" bIns="0" rtlCol="0" anchor="ctr"/>
           <a:lstStyle/>
           <a:p>
-            <a:pPr algn="ctr" indent="0" marL="0">
+            <a:pPr marL="0" indent="0" algn="ctr">
               <a:buNone/>
             </a:pPr>
             <a:r>
@@ -11297,7 +10994,7 @@
           <a:bodyPr wrap="square" lIns="0" tIns="0" rIns="0" bIns="0" rtlCol="0" anchor="ctr"/>
           <a:lstStyle/>
           <a:p>
-            <a:pPr algn="ctr" indent="0" marL="0">
+            <a:pPr marL="0" indent="0" algn="ctr">
               <a:buNone/>
             </a:pPr>
             <a:r>
@@ -11333,7 +11030,7 @@
           <a:bodyPr wrap="square" lIns="0" tIns="0" rIns="0" bIns="0" rtlCol="0" anchor="ctr"/>
           <a:lstStyle/>
           <a:p>
-            <a:pPr algn="r" indent="0" marL="0">
+            <a:pPr marL="0" indent="0" algn="r">
               <a:buNone/>
             </a:pPr>
             <a:r>
@@ -11347,7 +11044,7 @@
             <a:endParaRPr lang="en-US" sz="1400" dirty="0"/>
           </a:p>
           <a:p>
-            <a:pPr algn="r" indent="0" marL="0">
+            <a:pPr marL="0" indent="0" algn="r">
               <a:buNone/>
             </a:pPr>
             <a:r>
@@ -11383,7 +11080,7 @@
           <a:bodyPr wrap="square" lIns="0" tIns="0" rIns="0" bIns="0" rtlCol="0" anchor="ctr"/>
           <a:lstStyle/>
           <a:p>
-            <a:pPr algn="r" indent="0" marL="0">
+            <a:pPr marL="0" indent="0" algn="r">
               <a:buNone/>
             </a:pPr>
             <a:r>
@@ -11397,7 +11094,7 @@
             <a:endParaRPr lang="en-US" sz="1400" dirty="0"/>
           </a:p>
           <a:p>
-            <a:pPr algn="r" indent="0" marL="0">
+            <a:pPr marL="0" indent="0" algn="r">
               <a:buNone/>
             </a:pPr>
             <a:r>
@@ -11414,7 +11111,7 @@
       </p:sp>
       <p:sp>
         <p:nvSpPr>
-          <p:cNvPr id="10" name="cm cell 1"/>
+          <p:cNvPr id="3" name="cm cell 1"/>
           <p:cNvSpPr/>
           <p:nvPr/>
         </p:nvSpPr>
@@ -11458,7 +11155,7 @@
           <a:bodyPr wrap="square" lIns="0" tIns="0" rIns="0" bIns="0" rtlCol="0" anchor="ctr"/>
           <a:lstStyle/>
           <a:p>
-            <a:pPr algn="ctr" indent="0" marL="0">
+            <a:pPr marL="0" indent="0" algn="ctr">
               <a:buNone/>
             </a:pPr>
             <a:r>
@@ -11472,7 +11169,7 @@
             <a:endParaRPr lang="en-US" sz="2400" dirty="0"/>
           </a:p>
           <a:p>
-            <a:pPr algn="ctr" indent="0" marL="0">
+            <a:pPr marL="0" indent="0" algn="ctr">
               <a:buNone/>
             </a:pPr>
             <a:r>
@@ -11533,7 +11230,7 @@
           <a:bodyPr wrap="square" lIns="0" tIns="0" rIns="0" bIns="0" rtlCol="0" anchor="ctr"/>
           <a:lstStyle/>
           <a:p>
-            <a:pPr algn="ctr" indent="0" marL="0">
+            <a:pPr marL="0" indent="0" algn="ctr">
               <a:buNone/>
             </a:pPr>
             <a:r>
@@ -11547,7 +11244,7 @@
             <a:endParaRPr lang="en-US" sz="2400" dirty="0"/>
           </a:p>
           <a:p>
-            <a:pPr algn="ctr" indent="0" marL="0">
+            <a:pPr marL="0" indent="0" algn="ctr">
               <a:buNone/>
             </a:pPr>
             <a:r>
@@ -11608,7 +11305,7 @@
           <a:bodyPr wrap="square" lIns="0" tIns="0" rIns="0" bIns="0" rtlCol="0" anchor="ctr"/>
           <a:lstStyle/>
           <a:p>
-            <a:pPr algn="ctr" indent="0" marL="0">
+            <a:pPr marL="0" indent="0" algn="ctr">
               <a:buNone/>
             </a:pPr>
             <a:r>
@@ -11622,7 +11319,7 @@
             <a:endParaRPr lang="en-US" sz="2400" dirty="0"/>
           </a:p>
           <a:p>
-            <a:pPr algn="ctr" indent="0" marL="0">
+            <a:pPr marL="0" indent="0" algn="ctr">
               <a:buNone/>
             </a:pPr>
             <a:r>
@@ -11683,7 +11380,7 @@
           <a:bodyPr wrap="square" lIns="0" tIns="0" rIns="0" bIns="0" rtlCol="0" anchor="ctr"/>
           <a:lstStyle/>
           <a:p>
-            <a:pPr algn="ctr" indent="0" marL="0">
+            <a:pPr marL="0" indent="0" algn="ctr">
               <a:buNone/>
             </a:pPr>
             <a:r>
@@ -11697,7 +11394,7 @@
             <a:endParaRPr lang="en-US" sz="2400" dirty="0"/>
           </a:p>
           <a:p>
-            <a:pPr algn="ctr" indent="0" marL="0">
+            <a:pPr marL="0" indent="0" algn="ctr">
               <a:buNone/>
             </a:pPr>
             <a:r>
@@ -11760,7 +11457,7 @@
           <a:bodyPr wrap="square" lIns="0" tIns="0" rIns="0" bIns="0" rtlCol="0" anchor="ctr"/>
           <a:lstStyle/>
           <a:p>
-            <a:pPr indent="0" marL="0">
+            <a:pPr marL="0" indent="0">
               <a:buNone/>
             </a:pPr>
             <a:r>
@@ -11769,7 +11466,23 @@
                   <a:schemeClr val="tx2"/>
                 </a:solidFill>
               </a:rPr>
-              <a:t>424 of 436 fraud accounts caught; 3 false alarms among 1,528 legitimate accounts.</a:t>
+              <a:t>424 of 436 fraud accounts caught</a:t>
+            </a:r>
+            <a:r>
+              <a:rPr lang="en-US" sz="1600" b="1">
+                <a:solidFill>
+                  <a:schemeClr val="tx2"/>
+                </a:solidFill>
+              </a:rPr>
+              <a:t>, 3 </a:t>
+            </a:r>
+            <a:r>
+              <a:rPr lang="en-US" sz="1600" b="1" dirty="0">
+                <a:solidFill>
+                  <a:schemeClr val="tx2"/>
+                </a:solidFill>
+              </a:rPr>
+              <a:t>false alarms among 1,528 legitimate accounts.</a:t>
             </a:r>
             <a:endParaRPr lang="en-US" sz="1600" dirty="0"/>
           </a:p>
@@ -11795,7 +11508,7 @@
           </a:prstGeom>
           <a:extLst>
             <a:ext uri="{C572A759-6A51-4108-AA02-DFA0A04FC94B}">
-              <ma14:wrappingTextBoxFlag xmlns:ma14="http://schemas.microsoft.com/office/mac/drawingml/2011/main" val="0"/>
+              <ma14:wrappingTextBoxFlag xmlns:ma14="http://schemas.microsoft.com/office/mac/drawingml/2011/main" xmlns="" val="0"/>
             </a:ext>
           </a:extLst>
         </p:spPr>
@@ -11813,7 +11526,7 @@
           <a:p>
             <a:pPr algn="r"/>
             <a:fld id="{F7021451-1387-4CA6-816F-3879F97B5CBC}" type="slidenum">
-              <a:rPr b="0" lang="en-US"/>
+              <a:rPr lang="en-US" b="0"/>
               <a:t>9</a:t>
             </a:fld>
             <a:endParaRPr lang="en-US"/>
@@ -12121,4 +11834,299 @@
     </a:ext>
   </a:extLst>
 </a:theme>
+</file>
+
+<file path=ppt/theme/theme2.xml><?xml version="1.0" encoding="utf-8"?>
+<a:theme xmlns:a="http://schemas.openxmlformats.org/drawingml/2006/main" name="Office Theme">
+  <a:themeElements>
+    <a:clrScheme name="Office">
+      <a:dk1>
+        <a:sysClr val="windowText" lastClr="000000"/>
+      </a:dk1>
+      <a:lt1>
+        <a:sysClr val="window" lastClr="FFFFFF"/>
+      </a:lt1>
+      <a:dk2>
+        <a:srgbClr val="44546A"/>
+      </a:dk2>
+      <a:lt2>
+        <a:srgbClr val="E7E6E6"/>
+      </a:lt2>
+      <a:accent1>
+        <a:srgbClr val="4472C4"/>
+      </a:accent1>
+      <a:accent2>
+        <a:srgbClr val="ED7D31"/>
+      </a:accent2>
+      <a:accent3>
+        <a:srgbClr val="A5A5A5"/>
+      </a:accent3>
+      <a:accent4>
+        <a:srgbClr val="FFC000"/>
+      </a:accent4>
+      <a:accent5>
+        <a:srgbClr val="5B9BD5"/>
+      </a:accent5>
+      <a:accent6>
+        <a:srgbClr val="70AD47"/>
+      </a:accent6>
+      <a:hlink>
+        <a:srgbClr val="0563C1"/>
+      </a:hlink>
+      <a:folHlink>
+        <a:srgbClr val="954F72"/>
+      </a:folHlink>
+    </a:clrScheme>
+    <a:fontScheme name="Office">
+      <a:majorFont>
+        <a:latin typeface="Calibri Light" panose="020F0302020204030204"/>
+        <a:ea typeface=""/>
+        <a:cs typeface=""/>
+        <a:font script="Jpan" typeface="游ゴシック Light"/>
+        <a:font script="Hang" typeface="맑은 고딕"/>
+        <a:font script="Hans" typeface="等线 Light"/>
+        <a:font script="Hant" typeface="新細明體"/>
+        <a:font script="Arab" typeface="Times New Roman"/>
+        <a:font script="Hebr" typeface="Times New Roman"/>
+        <a:font script="Thai" typeface="Angsana New"/>
+        <a:font script="Ethi" typeface="Nyala"/>
+        <a:font script="Beng" typeface="Vrinda"/>
+        <a:font script="Gujr" typeface="Shruti"/>
+        <a:font script="Khmr" typeface="MoolBoran"/>
+        <a:font script="Knda" typeface="Tunga"/>
+        <a:font script="Guru" typeface="Raavi"/>
+        <a:font script="Cans" typeface="Euphemia"/>
+        <a:font script="Cher" typeface="Plantagenet Cherokee"/>
+        <a:font script="Yiii" typeface="Microsoft Yi Baiti"/>
+        <a:font script="Tibt" typeface="Microsoft Himalaya"/>
+        <a:font script="Thaa" typeface="MV Boli"/>
+        <a:font script="Deva" typeface="Mangal"/>
+        <a:font script="Telu" typeface="Gautami"/>
+        <a:font script="Taml" typeface="Latha"/>
+        <a:font script="Syrc" typeface="Estrangelo Edessa"/>
+        <a:font script="Orya" typeface="Kalinga"/>
+        <a:font script="Mlym" typeface="Kartika"/>
+        <a:font script="Laoo" typeface="DokChampa"/>
+        <a:font script="Sinh" typeface="Iskoola Pota"/>
+        <a:font script="Mong" typeface="Mongolian Baiti"/>
+        <a:font script="Viet" typeface="Times New Roman"/>
+        <a:font script="Uigh" typeface="Microsoft Uighur"/>
+        <a:font script="Geor" typeface="Sylfaen"/>
+        <a:font script="Armn" typeface="Arial"/>
+        <a:font script="Bugi" typeface="Leelawadee UI"/>
+        <a:font script="Bopo" typeface="Microsoft JhengHei"/>
+        <a:font script="Java" typeface="Javanese Text"/>
+        <a:font script="Lisu" typeface="Segoe UI"/>
+        <a:font script="Mymr" typeface="Myanmar Text"/>
+        <a:font script="Nkoo" typeface="Ebrima"/>
+        <a:font script="Olck" typeface="Nirmala UI"/>
+        <a:font script="Osma" typeface="Ebrima"/>
+        <a:font script="Phag" typeface="Phagspa"/>
+        <a:font script="Syrn" typeface="Estrangelo Edessa"/>
+        <a:font script="Syrj" typeface="Estrangelo Edessa"/>
+        <a:font script="Syre" typeface="Estrangelo Edessa"/>
+        <a:font script="Sora" typeface="Nirmala UI"/>
+        <a:font script="Tale" typeface="Microsoft Tai Le"/>
+        <a:font script="Talu" typeface="Microsoft New Tai Lue"/>
+        <a:font script="Tfng" typeface="Ebrima"/>
+      </a:majorFont>
+      <a:minorFont>
+        <a:latin typeface="Calibri" panose="020F0502020204030204"/>
+        <a:ea typeface=""/>
+        <a:cs typeface=""/>
+        <a:font script="Jpan" typeface="游ゴシック"/>
+        <a:font script="Hang" typeface="맑은 고딕"/>
+        <a:font script="Hans" typeface="等线"/>
+        <a:font script="Hant" typeface="新細明體"/>
+        <a:font script="Arab" typeface="Arial"/>
+        <a:font script="Hebr" typeface="Arial"/>
+        <a:font script="Thai" typeface="Cordia New"/>
+        <a:font script="Ethi" typeface="Nyala"/>
+        <a:font script="Beng" typeface="Vrinda"/>
+        <a:font script="Gujr" typeface="Shruti"/>
+        <a:font script="Khmr" typeface="DaunPenh"/>
+        <a:font script="Knda" typeface="Tunga"/>
+        <a:font script="Guru" typeface="Raavi"/>
+        <a:font script="Cans" typeface="Euphemia"/>
+        <a:font script="Cher" typeface="Plantagenet Cherokee"/>
+        <a:font script="Yiii" typeface="Microsoft Yi Baiti"/>
+        <a:font script="Tibt" typeface="Microsoft Himalaya"/>
+        <a:font script="Thaa" typeface="MV Boli"/>
+        <a:font script="Deva" typeface="Mangal"/>
+        <a:font script="Telu" typeface="Gautami"/>
+        <a:font script="Taml" typeface="Latha"/>
+        <a:font script="Syrc" typeface="Estrangelo Edessa"/>
+        <a:font script="Orya" typeface="Kalinga"/>
+        <a:font script="Mlym" typeface="Kartika"/>
+        <a:font script="Laoo" typeface="DokChampa"/>
+        <a:font script="Sinh" typeface="Iskoola Pota"/>
+        <a:font script="Mong" typeface="Mongolian Baiti"/>
+        <a:font script="Viet" typeface="Arial"/>
+        <a:font script="Uigh" typeface="Microsoft Uighur"/>
+        <a:font script="Geor" typeface="Sylfaen"/>
+        <a:font script="Armn" typeface="Arial"/>
+        <a:font script="Bugi" typeface="Leelawadee UI"/>
+        <a:font script="Bopo" typeface="Microsoft JhengHei"/>
+        <a:font script="Java" typeface="Javanese Text"/>
+        <a:font script="Lisu" typeface="Segoe UI"/>
+        <a:font script="Mymr" typeface="Myanmar Text"/>
+        <a:font script="Nkoo" typeface="Ebrima"/>
+        <a:font script="Olck" typeface="Nirmala UI"/>
+        <a:font script="Osma" typeface="Ebrima"/>
+        <a:font script="Phag" typeface="Phagspa"/>
+        <a:font script="Syrn" typeface="Estrangelo Edessa"/>
+        <a:font script="Syrj" typeface="Estrangelo Edessa"/>
+        <a:font script="Syre" typeface="Estrangelo Edessa"/>
+        <a:font script="Sora" typeface="Nirmala UI"/>
+        <a:font script="Tale" typeface="Microsoft Tai Le"/>
+        <a:font script="Talu" typeface="Microsoft New Tai Lue"/>
+        <a:font script="Tfng" typeface="Ebrima"/>
+      </a:minorFont>
+    </a:fontScheme>
+    <a:fmtScheme name="Office">
+      <a:fillStyleLst>
+        <a:solidFill>
+          <a:schemeClr val="phClr"/>
+        </a:solidFill>
+        <a:gradFill rotWithShape="1">
+          <a:gsLst>
+            <a:gs pos="0">
+              <a:schemeClr val="phClr">
+                <a:lumMod val="110000"/>
+                <a:satMod val="105000"/>
+                <a:tint val="67000"/>
+              </a:schemeClr>
+            </a:gs>
+            <a:gs pos="50000">
+              <a:schemeClr val="phClr">
+                <a:lumMod val="105000"/>
+                <a:satMod val="103000"/>
+                <a:tint val="73000"/>
+              </a:schemeClr>
+            </a:gs>
+            <a:gs pos="100000">
+              <a:schemeClr val="phClr">
+                <a:lumMod val="105000"/>
+                <a:satMod val="109000"/>
+                <a:tint val="81000"/>
+              </a:schemeClr>
+            </a:gs>
+          </a:gsLst>
+          <a:lin ang="5400000" scaled="0"/>
+        </a:gradFill>
+        <a:gradFill rotWithShape="1">
+          <a:gsLst>
+            <a:gs pos="0">
+              <a:schemeClr val="phClr">
+                <a:satMod val="103000"/>
+                <a:lumMod val="102000"/>
+                <a:tint val="94000"/>
+              </a:schemeClr>
+            </a:gs>
+            <a:gs pos="50000">
+              <a:schemeClr val="phClr">
+                <a:satMod val="110000"/>
+                <a:lumMod val="100000"/>
+                <a:shade val="100000"/>
+              </a:schemeClr>
+            </a:gs>
+            <a:gs pos="100000">
+              <a:schemeClr val="phClr">
+                <a:lumMod val="99000"/>
+                <a:satMod val="120000"/>
+                <a:shade val="78000"/>
+              </a:schemeClr>
+            </a:gs>
+          </a:gsLst>
+          <a:lin ang="5400000" scaled="0"/>
+        </a:gradFill>
+      </a:fillStyleLst>
+      <a:lnStyleLst>
+        <a:ln w="6350" cap="flat" cmpd="sng" algn="ctr">
+          <a:solidFill>
+            <a:schemeClr val="phClr"/>
+          </a:solidFill>
+          <a:prstDash val="solid"/>
+          <a:miter lim="800000"/>
+        </a:ln>
+        <a:ln w="12700" cap="flat" cmpd="sng" algn="ctr">
+          <a:solidFill>
+            <a:schemeClr val="phClr"/>
+          </a:solidFill>
+          <a:prstDash val="solid"/>
+          <a:miter lim="800000"/>
+        </a:ln>
+        <a:ln w="19050" cap="flat" cmpd="sng" algn="ctr">
+          <a:solidFill>
+            <a:schemeClr val="phClr"/>
+          </a:solidFill>
+          <a:prstDash val="solid"/>
+          <a:miter lim="800000"/>
+        </a:ln>
+      </a:lnStyleLst>
+      <a:effectStyleLst>
+        <a:effectStyle>
+          <a:effectLst/>
+        </a:effectStyle>
+        <a:effectStyle>
+          <a:effectLst/>
+        </a:effectStyle>
+        <a:effectStyle>
+          <a:effectLst>
+            <a:outerShdw blurRad="57150" dist="19050" dir="5400000" algn="ctr" rotWithShape="0">
+              <a:srgbClr val="000000">
+                <a:alpha val="63000"/>
+              </a:srgbClr>
+            </a:outerShdw>
+          </a:effectLst>
+        </a:effectStyle>
+      </a:effectStyleLst>
+      <a:bgFillStyleLst>
+        <a:solidFill>
+          <a:schemeClr val="phClr"/>
+        </a:solidFill>
+        <a:solidFill>
+          <a:schemeClr val="phClr">
+            <a:tint val="95000"/>
+            <a:satMod val="170000"/>
+          </a:schemeClr>
+        </a:solidFill>
+        <a:gradFill rotWithShape="1">
+          <a:gsLst>
+            <a:gs pos="0">
+              <a:schemeClr val="phClr">
+                <a:tint val="93000"/>
+                <a:satMod val="150000"/>
+                <a:shade val="98000"/>
+                <a:lumMod val="102000"/>
+              </a:schemeClr>
+            </a:gs>
+            <a:gs pos="50000">
+              <a:schemeClr val="phClr">
+                <a:tint val="98000"/>
+                <a:satMod val="130000"/>
+                <a:shade val="90000"/>
+                <a:lumMod val="103000"/>
+              </a:schemeClr>
+            </a:gs>
+            <a:gs pos="100000">
+              <a:schemeClr val="phClr">
+                <a:shade val="63000"/>
+                <a:satMod val="120000"/>
+              </a:schemeClr>
+            </a:gs>
+          </a:gsLst>
+          <a:lin ang="5400000" scaled="0"/>
+        </a:gradFill>
+      </a:bgFillStyleLst>
+    </a:fmtScheme>
+  </a:themeElements>
+  <a:objectDefaults/>
+  <a:extraClrSchemeLst/>
+  <a:extLst>
+    <a:ext uri="{05A4C25C-085E-4340-85A3-A5531E510DB2}">
+      <thm15:themeFamily xmlns:thm15="http://schemas.microsoft.com/office/thememl/2012/main" name="Office Theme" id="{62F939B6-93AF-4DB8-9C6B-D6C7DFDC589F}" vid="{4A3C46E8-61CC-4603-A589-7422A47A8E4A}"/>
+    </a:ext>
+  </a:extLst>
+</a:theme>
 </file>